--- a/ゲーム科2年/00_前期/ゲーム開発Ⅱ/02_就職作品.pptx
+++ b/ゲーム科2年/00_前期/ゲーム開発Ⅱ/02_就職作品.pptx
@@ -6,14 +6,11 @@
   </p:sldMasterIdLst>
   <p:sldIdLst>
     <p:sldId id="257" r:id="rId2"/>
-    <p:sldId id="258" r:id="rId3"/>
-    <p:sldId id="260" r:id="rId4"/>
+    <p:sldId id="261" r:id="rId3"/>
+    <p:sldId id="262" r:id="rId4"/>
     <p:sldId id="259" r:id="rId5"/>
-    <p:sldId id="261" r:id="rId6"/>
-    <p:sldId id="262" r:id="rId7"/>
-    <p:sldId id="263" r:id="rId8"/>
-    <p:sldId id="264" r:id="rId9"/>
-    <p:sldId id="265" r:id="rId10"/>
+    <p:sldId id="260" r:id="rId6"/>
+    <p:sldId id="263" r:id="rId7"/>
   </p:sldIdLst>
   <p:sldSz cx="12192000" cy="6858000"/>
   <p:notesSz cx="6858000" cy="9144000"/>
@@ -267,7 +264,7 @@
           <a:p>
             <a:fld id="{E9CC885B-4903-4D54-9A93-00025F12DED9}" type="datetimeFigureOut">
               <a:rPr kumimoji="1" lang="ja-JP" altLang="en-US" smtClean="0"/>
-              <a:t>2025/5/15</a:t>
+              <a:t>2026/3/12</a:t>
             </a:fld>
             <a:endParaRPr kumimoji="1" lang="ja-JP" altLang="en-US"/>
           </a:p>
@@ -497,7 +494,7 @@
           <a:p>
             <a:fld id="{E9CC885B-4903-4D54-9A93-00025F12DED9}" type="datetimeFigureOut">
               <a:rPr kumimoji="1" lang="ja-JP" altLang="en-US" smtClean="0"/>
-              <a:t>2025/5/15</a:t>
+              <a:t>2026/3/12</a:t>
             </a:fld>
             <a:endParaRPr kumimoji="1" lang="ja-JP" altLang="en-US"/>
           </a:p>
@@ -737,7 +734,7 @@
           <a:p>
             <a:fld id="{E9CC885B-4903-4D54-9A93-00025F12DED9}" type="datetimeFigureOut">
               <a:rPr kumimoji="1" lang="ja-JP" altLang="en-US" smtClean="0"/>
-              <a:t>2025/5/15</a:t>
+              <a:t>2026/3/12</a:t>
             </a:fld>
             <a:endParaRPr kumimoji="1" lang="ja-JP" altLang="en-US"/>
           </a:p>
@@ -967,7 +964,7 @@
           <a:p>
             <a:fld id="{E9CC885B-4903-4D54-9A93-00025F12DED9}" type="datetimeFigureOut">
               <a:rPr kumimoji="1" lang="ja-JP" altLang="en-US" smtClean="0"/>
-              <a:t>2025/5/15</a:t>
+              <a:t>2026/3/12</a:t>
             </a:fld>
             <a:endParaRPr kumimoji="1" lang="ja-JP" altLang="en-US"/>
           </a:p>
@@ -1242,7 +1239,7 @@
           <a:p>
             <a:fld id="{E9CC885B-4903-4D54-9A93-00025F12DED9}" type="datetimeFigureOut">
               <a:rPr kumimoji="1" lang="ja-JP" altLang="en-US" smtClean="0"/>
-              <a:t>2025/5/15</a:t>
+              <a:t>2026/3/12</a:t>
             </a:fld>
             <a:endParaRPr kumimoji="1" lang="ja-JP" altLang="en-US"/>
           </a:p>
@@ -1571,7 +1568,7 @@
           <a:p>
             <a:fld id="{E9CC885B-4903-4D54-9A93-00025F12DED9}" type="datetimeFigureOut">
               <a:rPr kumimoji="1" lang="ja-JP" altLang="en-US" smtClean="0"/>
-              <a:t>2025/5/15</a:t>
+              <a:t>2026/3/12</a:t>
             </a:fld>
             <a:endParaRPr kumimoji="1" lang="ja-JP" altLang="en-US"/>
           </a:p>
@@ -2047,7 +2044,7 @@
           <a:p>
             <a:fld id="{E9CC885B-4903-4D54-9A93-00025F12DED9}" type="datetimeFigureOut">
               <a:rPr kumimoji="1" lang="ja-JP" altLang="en-US" smtClean="0"/>
-              <a:t>2025/5/15</a:t>
+              <a:t>2026/3/12</a:t>
             </a:fld>
             <a:endParaRPr kumimoji="1" lang="ja-JP" altLang="en-US"/>
           </a:p>
@@ -2188,7 +2185,7 @@
           <a:p>
             <a:fld id="{E9CC885B-4903-4D54-9A93-00025F12DED9}" type="datetimeFigureOut">
               <a:rPr kumimoji="1" lang="ja-JP" altLang="en-US" smtClean="0"/>
-              <a:t>2025/5/15</a:t>
+              <a:t>2026/3/12</a:t>
             </a:fld>
             <a:endParaRPr kumimoji="1" lang="ja-JP" altLang="en-US"/>
           </a:p>
@@ -2301,7 +2298,7 @@
           <a:p>
             <a:fld id="{E9CC885B-4903-4D54-9A93-00025F12DED9}" type="datetimeFigureOut">
               <a:rPr kumimoji="1" lang="ja-JP" altLang="en-US" smtClean="0"/>
-              <a:t>2025/5/15</a:t>
+              <a:t>2026/3/12</a:t>
             </a:fld>
             <a:endParaRPr kumimoji="1" lang="ja-JP" altLang="en-US"/>
           </a:p>
@@ -2644,7 +2641,7 @@
           <a:p>
             <a:fld id="{E9CC885B-4903-4D54-9A93-00025F12DED9}" type="datetimeFigureOut">
               <a:rPr kumimoji="1" lang="ja-JP" altLang="en-US" smtClean="0"/>
-              <a:t>2025/5/15</a:t>
+              <a:t>2026/3/12</a:t>
             </a:fld>
             <a:endParaRPr kumimoji="1" lang="ja-JP" altLang="en-US"/>
           </a:p>
@@ -2932,7 +2929,7 @@
           <a:p>
             <a:fld id="{E9CC885B-4903-4D54-9A93-00025F12DED9}" type="datetimeFigureOut">
               <a:rPr kumimoji="1" lang="ja-JP" altLang="en-US" smtClean="0"/>
-              <a:t>2025/5/15</a:t>
+              <a:t>2026/3/12</a:t>
             </a:fld>
             <a:endParaRPr kumimoji="1" lang="ja-JP" altLang="en-US"/>
           </a:p>
@@ -3205,7 +3202,7 @@
           <a:p>
             <a:fld id="{E9CC885B-4903-4D54-9A93-00025F12DED9}" type="datetimeFigureOut">
               <a:rPr kumimoji="1" lang="ja-JP" altLang="en-US" smtClean="0"/>
-              <a:t>2025/5/15</a:t>
+              <a:t>2026/3/12</a:t>
             </a:fld>
             <a:endParaRPr kumimoji="1" lang="ja-JP" altLang="en-US"/>
           </a:p>
@@ -3673,7 +3670,7 @@
         <p:spPr>
           <a:xfrm>
             <a:off x="567542" y="1216429"/>
-            <a:ext cx="8802410" cy="830997"/>
+            <a:ext cx="8186857" cy="2308324"/>
           </a:xfrm>
           <a:prstGeom prst="rect">
             <a:avLst/>
@@ -3688,28 +3685,44 @@
           <a:p>
             <a:r>
               <a:rPr kumimoji="1" lang="ja-JP" altLang="en-US" sz="2400" dirty="0"/>
-              <a:t>ゲームプランニングの授業で企画した就職作品を制作します。</a:t>
+              <a:t>就職活動で企業に提出するメインとなる作品を作ります。</a:t>
             </a:r>
             <a:endParaRPr kumimoji="1" lang="en-US" altLang="ja-JP" sz="2400" dirty="0"/>
           </a:p>
           <a:p>
-            <a:r>
-              <a:rPr lang="ja-JP" altLang="en-US" sz="2400" dirty="0"/>
-              <a:t>まずは</a:t>
-            </a:r>
-            <a:r>
-              <a:rPr lang="ja-JP" altLang="en-US" sz="2400" b="1" dirty="0">
-                <a:solidFill>
-                  <a:srgbClr val="FF0000"/>
-                </a:solidFill>
-              </a:rPr>
-              <a:t>企画を元に実装に必要なものを洗い出します。</a:t>
-            </a:r>
             <a:endParaRPr lang="en-US" altLang="ja-JP" sz="2400" b="1" dirty="0">
               <a:solidFill>
                 <a:srgbClr val="FF0000"/>
               </a:solidFill>
             </a:endParaRPr>
+          </a:p>
+          <a:p>
+            <a:r>
+              <a:rPr lang="ja-JP" altLang="en-US" sz="2400" dirty="0"/>
+              <a:t>１年生の時と同様に、</a:t>
+            </a:r>
+            <a:endParaRPr lang="en-US" altLang="ja-JP" sz="2400" dirty="0"/>
+          </a:p>
+          <a:p>
+            <a:r>
+              <a:rPr lang="ja-JP" altLang="en-US" sz="2400" b="1" dirty="0"/>
+              <a:t>企画書　→　仕様書　→　スケジュール　→　制作開始</a:t>
+            </a:r>
+            <a:endParaRPr lang="en-US" altLang="ja-JP" sz="2400" b="1" dirty="0"/>
+          </a:p>
+          <a:p>
+            <a:endParaRPr lang="en-US" altLang="ja-JP" sz="2400" b="1" dirty="0">
+              <a:solidFill>
+                <a:srgbClr val="FF0000"/>
+              </a:solidFill>
+            </a:endParaRPr>
+          </a:p>
+          <a:p>
+            <a:r>
+              <a:rPr lang="ja-JP" altLang="en-US" sz="2400" dirty="0"/>
+              <a:t>この流れで制作します。</a:t>
+            </a:r>
+            <a:endParaRPr lang="en-US" altLang="ja-JP" sz="2400" dirty="0"/>
           </a:p>
         </p:txBody>
       </p:sp>
@@ -3794,7 +3807,7 @@
         <p:spPr>
           <a:xfrm>
             <a:off x="567542" y="1216429"/>
-            <a:ext cx="10341293" cy="830997"/>
+            <a:ext cx="6647974" cy="2677656"/>
           </a:xfrm>
           <a:prstGeom prst="rect">
             <a:avLst/>
@@ -3808,62 +3821,67 @@
           <a:lstStyle/>
           <a:p>
             <a:r>
-              <a:rPr kumimoji="1" lang="ja-JP" altLang="en-US" sz="2400" dirty="0"/>
-              <a:t>配布した資料を参考に、可能な限りゲームに必要な要素を書きましょう。</a:t>
-            </a:r>
-            <a:endParaRPr kumimoji="1" lang="en-US" altLang="ja-JP" sz="2400" b="1" dirty="0">
-              <a:solidFill>
-                <a:srgbClr val="FF0000"/>
-              </a:solidFill>
-            </a:endParaRPr>
-          </a:p>
-          <a:p>
-            <a:r>
-              <a:rPr lang="ja-JP" altLang="en-US" sz="2400" b="1" dirty="0">
-                <a:solidFill>
-                  <a:srgbClr val="FF0000"/>
-                </a:solidFill>
-              </a:rPr>
-              <a:t>細かく書くほど、この後のガントチャートが書きやすくなります。</a:t>
-            </a:r>
-            <a:endParaRPr kumimoji="1" lang="en-US" altLang="ja-JP" sz="2400" dirty="0"/>
-          </a:p>
-        </p:txBody>
-      </p:sp>
-      <p:pic>
-        <p:nvPicPr>
-          <p:cNvPr id="3" name="図 2">
-            <a:extLst>
-              <a:ext uri="{FF2B5EF4-FFF2-40B4-BE49-F238E27FC236}">
-                <a16:creationId xmlns:a16="http://schemas.microsoft.com/office/drawing/2014/main" id="{F0F2338C-5C7B-4C91-B5B3-BEF129D2952D}"/>
-              </a:ext>
-            </a:extLst>
-          </p:cNvPr>
-          <p:cNvPicPr>
-            <a:picLocks noChangeAspect="1"/>
-          </p:cNvPicPr>
-          <p:nvPr/>
-        </p:nvPicPr>
-        <p:blipFill>
-          <a:blip r:embed="rId2"/>
-          <a:stretch>
-            <a:fillRect/>
-          </a:stretch>
-        </p:blipFill>
-        <p:spPr>
-          <a:xfrm>
-            <a:off x="567542" y="2288780"/>
-            <a:ext cx="4241525" cy="3932489"/>
-          </a:xfrm>
-          <a:prstGeom prst="rect">
-            <a:avLst/>
-          </a:prstGeom>
-        </p:spPr>
-      </p:pic>
+              <a:rPr lang="ja-JP" altLang="en-US" sz="2400" dirty="0"/>
+              <a:t>基本情報を以下にまとめます。</a:t>
+            </a:r>
+            <a:endParaRPr lang="en-US" altLang="ja-JP" sz="2400" dirty="0"/>
+          </a:p>
+          <a:p>
+            <a:endParaRPr lang="en-US" altLang="ja-JP" sz="2400" dirty="0"/>
+          </a:p>
+          <a:p>
+            <a:r>
+              <a:rPr lang="ja-JP" altLang="en-US" sz="2400" dirty="0"/>
+              <a:t>開発環境：</a:t>
+            </a:r>
+            <a:r>
+              <a:rPr lang="en-US" altLang="ja-JP" sz="2400" dirty="0"/>
+              <a:t>C++ </a:t>
+            </a:r>
+            <a:r>
+              <a:rPr lang="ja-JP" altLang="en-US" sz="2400" dirty="0"/>
+              <a:t>＆ </a:t>
+            </a:r>
+            <a:r>
+              <a:rPr lang="en-US" altLang="ja-JP" sz="2400" dirty="0"/>
+              <a:t>DX</a:t>
+            </a:r>
+            <a:r>
+              <a:rPr lang="ja-JP" altLang="en-US" sz="2400" dirty="0"/>
+              <a:t>ライブラリ</a:t>
+            </a:r>
+            <a:endParaRPr lang="en-US" altLang="ja-JP" sz="2400" dirty="0"/>
+          </a:p>
+          <a:p>
+            <a:r>
+              <a:rPr lang="ja-JP" altLang="en-US" sz="2400" dirty="0"/>
+              <a:t>ジャンル：アクションゲーム（推奨）</a:t>
+            </a:r>
+            <a:endParaRPr lang="en-US" altLang="ja-JP" sz="2400" dirty="0"/>
+          </a:p>
+          <a:p>
+            <a:r>
+              <a:rPr lang="ja-JP" altLang="en-US" sz="2400" dirty="0"/>
+              <a:t>締め切り：１月実施予定の作品展示会３日前</a:t>
+            </a:r>
+            <a:endParaRPr lang="en-US" altLang="ja-JP" sz="2400" dirty="0"/>
+          </a:p>
+          <a:p>
+            <a:endParaRPr lang="en-US" altLang="ja-JP" sz="2400" dirty="0"/>
+          </a:p>
+          <a:p>
+            <a:r>
+              <a:rPr lang="ja-JP" altLang="en-US" sz="2400" dirty="0"/>
+              <a:t>変更したい場合は担任に必ず相談しましょう。</a:t>
+            </a:r>
+            <a:endParaRPr lang="en-US" altLang="ja-JP" sz="2400" dirty="0"/>
+          </a:p>
+        </p:txBody>
+      </p:sp>
     </p:spTree>
     <p:extLst>
       <p:ext uri="{BB962C8B-B14F-4D97-AF65-F5344CB8AC3E}">
-        <p14:creationId xmlns:p14="http://schemas.microsoft.com/office/powerpoint/2010/main" val="648277603"/>
+        <p14:creationId xmlns:p14="http://schemas.microsoft.com/office/powerpoint/2010/main" val="965409376"/>
       </p:ext>
     </p:extLst>
   </p:cSld>
@@ -3941,7 +3959,7 @@
         <p:spPr>
           <a:xfrm>
             <a:off x="567542" y="1216429"/>
-            <a:ext cx="9417963" cy="830997"/>
+            <a:ext cx="7879080" cy="4524315"/>
           </a:xfrm>
           <a:prstGeom prst="rect">
             <a:avLst/>
@@ -3955,22 +3973,20 @@
           <a:lstStyle/>
           <a:p>
             <a:r>
-              <a:rPr kumimoji="1" lang="ja-JP" altLang="en-US" sz="2400" dirty="0"/>
-              <a:t>スケジュール管理で最もよく使われるものが</a:t>
-            </a:r>
-            <a:r>
-              <a:rPr kumimoji="1" lang="ja-JP" altLang="en-US" sz="2400" b="1" dirty="0">
-                <a:solidFill>
-                  <a:srgbClr val="FF0000"/>
-                </a:solidFill>
-              </a:rPr>
-              <a:t>ガントチャート</a:t>
-            </a:r>
-            <a:r>
-              <a:rPr kumimoji="1" lang="ja-JP" altLang="en-US" sz="2400" dirty="0"/>
-              <a:t>です。</a:t>
-            </a:r>
-            <a:endParaRPr kumimoji="1" lang="en-US" altLang="ja-JP" sz="2400" dirty="0"/>
+              <a:rPr lang="ja-JP" altLang="en-US" sz="2400" dirty="0"/>
+              <a:t>以下の科目の終了時に進捗確認用の提出をします。</a:t>
+            </a:r>
+            <a:endParaRPr lang="en-US" altLang="ja-JP" sz="2400" dirty="0"/>
+          </a:p>
+          <a:p>
+            <a:r>
+              <a:rPr lang="ja-JP" altLang="en-US" sz="2400" dirty="0"/>
+              <a:t>進捗内容から成績が決まります。</a:t>
+            </a:r>
+            <a:endParaRPr lang="en-US" altLang="ja-JP" sz="2400" dirty="0"/>
+          </a:p>
+          <a:p>
+            <a:endParaRPr lang="en-US" altLang="ja-JP" sz="2400" dirty="0"/>
           </a:p>
           <a:p>
             <a:r>
@@ -3979,50 +3995,96 @@
                   <a:srgbClr val="FF0000"/>
                 </a:solidFill>
               </a:rPr>
-              <a:t>タスク（作業）ごとに、進捗をまとめたグラフ</a:t>
-            </a:r>
+              <a:t>■対象科目</a:t>
+            </a:r>
+            <a:endParaRPr lang="en-US" altLang="ja-JP" sz="2400" b="1" dirty="0">
+              <a:solidFill>
+                <a:srgbClr val="FF0000"/>
+              </a:solidFill>
+            </a:endParaRPr>
+          </a:p>
+          <a:p>
             <a:r>
               <a:rPr lang="ja-JP" altLang="en-US" sz="2400" dirty="0"/>
-              <a:t>になります。</a:t>
-            </a:r>
-            <a:endParaRPr kumimoji="1" lang="en-US" altLang="ja-JP" sz="2400" dirty="0"/>
-          </a:p>
-        </p:txBody>
-      </p:sp>
-      <p:pic>
-        <p:nvPicPr>
-          <p:cNvPr id="7" name="図 6">
-            <a:extLst>
-              <a:ext uri="{FF2B5EF4-FFF2-40B4-BE49-F238E27FC236}">
-                <a16:creationId xmlns:a16="http://schemas.microsoft.com/office/drawing/2014/main" id="{440A9FA3-F708-458D-B8C9-21598A2CE5E6}"/>
-              </a:ext>
-            </a:extLst>
-          </p:cNvPr>
-          <p:cNvPicPr>
-            <a:picLocks noChangeAspect="1"/>
-          </p:cNvPicPr>
-          <p:nvPr/>
-        </p:nvPicPr>
-        <p:blipFill>
-          <a:blip r:embed="rId2"/>
-          <a:stretch>
-            <a:fillRect/>
-          </a:stretch>
-        </p:blipFill>
-        <p:spPr>
-          <a:xfrm>
-            <a:off x="567542" y="2187126"/>
-            <a:ext cx="9693146" cy="4191492"/>
-          </a:xfrm>
-          <a:prstGeom prst="rect">
-            <a:avLst/>
-          </a:prstGeom>
-        </p:spPr>
-      </p:pic>
+              <a:t>・ゲーム開発</a:t>
+            </a:r>
+            <a:r>
+              <a:rPr lang="en-US" altLang="ja-JP" sz="2400" dirty="0"/>
+              <a:t>Ⅱ</a:t>
+            </a:r>
+          </a:p>
+          <a:p>
+            <a:r>
+              <a:rPr lang="ja-JP" altLang="en-US" sz="2400" dirty="0"/>
+              <a:t>・ゲーム開発</a:t>
+            </a:r>
+            <a:r>
+              <a:rPr lang="en-US" altLang="ja-JP" sz="2400" dirty="0"/>
+              <a:t>Ⅲ</a:t>
+            </a:r>
+          </a:p>
+          <a:p>
+            <a:r>
+              <a:rPr lang="ja-JP" altLang="en-US" sz="2400" dirty="0"/>
+              <a:t>・制作実習</a:t>
+            </a:r>
+            <a:r>
+              <a:rPr lang="en-US" altLang="ja-JP" sz="2400" dirty="0"/>
+              <a:t>Ⅰ</a:t>
+            </a:r>
+          </a:p>
+          <a:p>
+            <a:r>
+              <a:rPr lang="ja-JP" altLang="en-US" sz="2400" dirty="0"/>
+              <a:t>・制作実習</a:t>
+            </a:r>
+            <a:r>
+              <a:rPr lang="en-US" altLang="ja-JP" sz="2400" dirty="0"/>
+              <a:t>Ⅱ</a:t>
+            </a:r>
+          </a:p>
+          <a:p>
+            <a:r>
+              <a:rPr lang="en-US" altLang="ja-JP" sz="2400" dirty="0"/>
+              <a:t>※</a:t>
+            </a:r>
+            <a:r>
+              <a:rPr lang="ja-JP" altLang="en-US" sz="2400" dirty="0"/>
+              <a:t>ゲーム開発</a:t>
+            </a:r>
+            <a:r>
+              <a:rPr lang="en-US" altLang="ja-JP" sz="2400" dirty="0"/>
+              <a:t>Ⅲ</a:t>
+            </a:r>
+            <a:r>
+              <a:rPr lang="ja-JP" altLang="en-US" sz="2400" dirty="0"/>
+              <a:t>の成績にはゲーム物理学も含まれます。</a:t>
+            </a:r>
+            <a:endParaRPr lang="en-US" altLang="ja-JP" sz="2400" dirty="0"/>
+          </a:p>
+          <a:p>
+            <a:endParaRPr lang="en-US" altLang="ja-JP" sz="2400" dirty="0"/>
+          </a:p>
+          <a:p>
+            <a:r>
+              <a:rPr lang="ja-JP" altLang="en-US" sz="2400" dirty="0"/>
+              <a:t>保護者の方に、これら４科目の成績が悪い場合、</a:t>
+            </a:r>
+            <a:endParaRPr lang="en-US" altLang="ja-JP" sz="2400" dirty="0"/>
+          </a:p>
+          <a:p>
+            <a:r>
+              <a:rPr lang="ja-JP" altLang="en-US" sz="2400" dirty="0"/>
+              <a:t>業界就職が厳しくなると伝えてください。</a:t>
+            </a:r>
+            <a:endParaRPr lang="en-US" altLang="ja-JP" sz="2400" dirty="0"/>
+          </a:p>
+        </p:txBody>
+      </p:sp>
     </p:spTree>
     <p:extLst>
       <p:ext uri="{BB962C8B-B14F-4D97-AF65-F5344CB8AC3E}">
-        <p14:creationId xmlns:p14="http://schemas.microsoft.com/office/powerpoint/2010/main" val="2462224013"/>
+        <p14:creationId xmlns:p14="http://schemas.microsoft.com/office/powerpoint/2010/main" val="3299238209"/>
       </p:ext>
     </p:extLst>
   </p:cSld>
@@ -4064,7 +4126,7 @@
         <p:spPr>
           <a:xfrm>
             <a:off x="567542" y="491954"/>
-            <a:ext cx="1826141" cy="584775"/>
+            <a:ext cx="2763898" cy="584775"/>
           </a:xfrm>
           <a:prstGeom prst="rect">
             <a:avLst/>
@@ -4079,7 +4141,7 @@
           <a:p>
             <a:r>
               <a:rPr kumimoji="1" lang="ja-JP" altLang="en-US" sz="3200" b="1" u="sng" dirty="0"/>
-              <a:t>就職作品</a:t>
+              <a:t>就職作品 制作</a:t>
             </a:r>
             <a:endParaRPr kumimoji="1" lang="en-US" altLang="ja-JP" sz="3200" b="1" u="sng" dirty="0"/>
           </a:p>
@@ -4100,7 +4162,7 @@
         <p:spPr>
           <a:xfrm>
             <a:off x="567542" y="1216429"/>
-            <a:ext cx="10649069" cy="461665"/>
+            <a:ext cx="7879080" cy="4893647"/>
           </a:xfrm>
           <a:prstGeom prst="rect">
             <a:avLst/>
@@ -4114,99 +4176,109 @@
           <a:lstStyle/>
           <a:p>
             <a:r>
-              <a:rPr kumimoji="1" lang="ja-JP" altLang="en-US" sz="2400" dirty="0"/>
-              <a:t>左側にいつから作業を開始するか、その作業が何日かかるのかを書きます。</a:t>
-            </a:r>
-            <a:endParaRPr kumimoji="1" lang="en-US" altLang="ja-JP" sz="2400" dirty="0"/>
-          </a:p>
-        </p:txBody>
-      </p:sp>
-      <p:pic>
-        <p:nvPicPr>
-          <p:cNvPr id="5" name="図 4">
-            <a:extLst>
-              <a:ext uri="{FF2B5EF4-FFF2-40B4-BE49-F238E27FC236}">
-                <a16:creationId xmlns:a16="http://schemas.microsoft.com/office/drawing/2014/main" id="{3B75878E-789F-4FE2-B159-6B1B7DE2CAF2}"/>
-              </a:ext>
-            </a:extLst>
-          </p:cNvPr>
-          <p:cNvPicPr>
-            <a:picLocks noChangeAspect="1"/>
-          </p:cNvPicPr>
-          <p:nvPr/>
-        </p:nvPicPr>
-        <p:blipFill>
-          <a:blip r:embed="rId2"/>
-          <a:stretch>
-            <a:fillRect/>
-          </a:stretch>
-        </p:blipFill>
-        <p:spPr>
-          <a:xfrm>
-            <a:off x="567542" y="2187126"/>
-            <a:ext cx="9693146" cy="4191492"/>
-          </a:xfrm>
-          <a:prstGeom prst="rect">
-            <a:avLst/>
-          </a:prstGeom>
-        </p:spPr>
-      </p:pic>
-      <p:sp>
-        <p:nvSpPr>
-          <p:cNvPr id="7" name="正方形/長方形 6">
-            <a:extLst>
-              <a:ext uri="{FF2B5EF4-FFF2-40B4-BE49-F238E27FC236}">
-                <a16:creationId xmlns:a16="http://schemas.microsoft.com/office/drawing/2014/main" id="{42409BA7-D966-4EFA-B248-AF9B507F803E}"/>
-              </a:ext>
-            </a:extLst>
-          </p:cNvPr>
-          <p:cNvSpPr/>
-          <p:nvPr/>
-        </p:nvSpPr>
-        <p:spPr>
-          <a:xfrm>
-            <a:off x="1540933" y="3141133"/>
-            <a:ext cx="1100667" cy="1921934"/>
-          </a:xfrm>
-          <a:prstGeom prst="rect">
-            <a:avLst/>
-          </a:prstGeom>
-          <a:noFill/>
-          <a:ln w="38100">
-            <a:solidFill>
-              <a:srgbClr val="FF0000"/>
-            </a:solidFill>
-          </a:ln>
-        </p:spPr>
-        <p:style>
-          <a:lnRef idx="2">
-            <a:schemeClr val="accent1">
-              <a:shade val="50000"/>
-            </a:schemeClr>
-          </a:lnRef>
-          <a:fillRef idx="1">
-            <a:schemeClr val="accent1"/>
-          </a:fillRef>
-          <a:effectRef idx="0">
-            <a:schemeClr val="accent1"/>
-          </a:effectRef>
-          <a:fontRef idx="minor">
-            <a:schemeClr val="lt1"/>
-          </a:fontRef>
-        </p:style>
-        <p:txBody>
-          <a:bodyPr rtlCol="0" anchor="ctr"/>
-          <a:lstStyle/>
-          <a:p>
-            <a:pPr algn="ctr"/>
-            <a:endParaRPr kumimoji="1" lang="ja-JP" altLang="en-US"/>
+              <a:rPr lang="ja-JP" altLang="en-US" sz="2400" dirty="0"/>
+              <a:t>最新の</a:t>
+            </a:r>
+            <a:r>
+              <a:rPr lang="en-US" altLang="ja-JP" sz="2400" dirty="0"/>
+              <a:t>C++</a:t>
+            </a:r>
+            <a:r>
+              <a:rPr lang="ja-JP" altLang="en-US" sz="2400" dirty="0"/>
+              <a:t>授業資料をお配りします。</a:t>
+            </a:r>
+            <a:endParaRPr lang="en-US" altLang="ja-JP" sz="2400" dirty="0"/>
+          </a:p>
+          <a:p>
+            <a:r>
+              <a:rPr lang="ja-JP" altLang="en-US" sz="2400" dirty="0"/>
+              <a:t>これらのテクニックを十分に使って制作してください。</a:t>
+            </a:r>
+            <a:endParaRPr lang="en-US" altLang="ja-JP" sz="2400" dirty="0"/>
+          </a:p>
+          <a:p>
+            <a:endParaRPr lang="en-US" altLang="ja-JP" sz="2400" dirty="0"/>
+          </a:p>
+          <a:p>
+            <a:r>
+              <a:rPr lang="ja-JP" altLang="en-US" sz="2400" b="1" dirty="0">
+                <a:solidFill>
+                  <a:srgbClr val="FF0000"/>
+                </a:solidFill>
+              </a:rPr>
+              <a:t>■使ってほしい技術</a:t>
+            </a:r>
+            <a:endParaRPr lang="en-US" altLang="ja-JP" sz="2400" b="1" dirty="0">
+              <a:solidFill>
+                <a:srgbClr val="FF0000"/>
+              </a:solidFill>
+            </a:endParaRPr>
+          </a:p>
+          <a:p>
+            <a:r>
+              <a:rPr lang="ja-JP" altLang="en-US" sz="2400" dirty="0"/>
+              <a:t>・スマートポインタ</a:t>
+            </a:r>
+            <a:endParaRPr lang="en-US" altLang="ja-JP" sz="2400" dirty="0"/>
+          </a:p>
+          <a:p>
+            <a:r>
+              <a:rPr lang="ja-JP" altLang="en-US" sz="2400" dirty="0"/>
+              <a:t>・マルチスレッド</a:t>
+            </a:r>
+            <a:endParaRPr lang="en-US" altLang="ja-JP" sz="2400" dirty="0"/>
+          </a:p>
+          <a:p>
+            <a:r>
+              <a:rPr lang="ja-JP" altLang="en-US" sz="2400" dirty="0"/>
+              <a:t>・ファイル操作</a:t>
+            </a:r>
+            <a:endParaRPr lang="en-US" altLang="ja-JP" sz="2400" dirty="0"/>
+          </a:p>
+          <a:p>
+            <a:r>
+              <a:rPr lang="ja-JP" altLang="en-US" sz="2400" dirty="0"/>
+              <a:t>・動的配列クラス</a:t>
+            </a:r>
+            <a:endParaRPr lang="en-US" altLang="ja-JP" sz="2400" dirty="0"/>
+          </a:p>
+          <a:p>
+            <a:r>
+              <a:rPr lang="ja-JP" altLang="en-US" sz="2400" dirty="0"/>
+              <a:t>・リストクラス</a:t>
+            </a:r>
+            <a:endParaRPr lang="en-US" altLang="ja-JP" sz="2400" dirty="0"/>
+          </a:p>
+          <a:p>
+            <a:endParaRPr lang="en-US" altLang="ja-JP" sz="2400" dirty="0"/>
+          </a:p>
+          <a:p>
+            <a:r>
+              <a:rPr lang="ja-JP" altLang="en-US" sz="2400" dirty="0"/>
+              <a:t>難しいと思うものを無理に使う必要はありませんが、</a:t>
+            </a:r>
+            <a:endParaRPr lang="en-US" altLang="ja-JP" sz="2400" dirty="0"/>
+          </a:p>
+          <a:p>
+            <a:r>
+              <a:rPr lang="ja-JP" altLang="en-US" sz="2400" dirty="0"/>
+              <a:t>これらが使われている作品は高く評価されますし、</a:t>
+            </a:r>
+            <a:endParaRPr lang="en-US" altLang="ja-JP" sz="2400" dirty="0"/>
+          </a:p>
+          <a:p>
+            <a:r>
+              <a:rPr lang="ja-JP" altLang="en-US" sz="2400" dirty="0"/>
+              <a:t>ポートフォリオにも載せることができます。</a:t>
+            </a:r>
+            <a:endParaRPr lang="en-US" altLang="ja-JP" sz="2400" dirty="0"/>
           </a:p>
         </p:txBody>
       </p:sp>
     </p:spTree>
     <p:extLst>
       <p:ext uri="{BB962C8B-B14F-4D97-AF65-F5344CB8AC3E}">
-        <p14:creationId xmlns:p14="http://schemas.microsoft.com/office/powerpoint/2010/main" val="4005982769"/>
+        <p14:creationId xmlns:p14="http://schemas.microsoft.com/office/powerpoint/2010/main" val="248732990"/>
       </p:ext>
     </p:extLst>
   </p:cSld>
@@ -4248,7 +4320,7 @@
         <p:spPr>
           <a:xfrm>
             <a:off x="567542" y="491954"/>
-            <a:ext cx="1826141" cy="584775"/>
+            <a:ext cx="2763898" cy="584775"/>
           </a:xfrm>
           <a:prstGeom prst="rect">
             <a:avLst/>
@@ -4263,7 +4335,7 @@
           <a:p>
             <a:r>
               <a:rPr kumimoji="1" lang="ja-JP" altLang="en-US" sz="3200" b="1" u="sng" dirty="0"/>
-              <a:t>就職作品</a:t>
+              <a:t>就職作品 制作</a:t>
             </a:r>
             <a:endParaRPr kumimoji="1" lang="en-US" altLang="ja-JP" sz="3200" b="1" u="sng" dirty="0"/>
           </a:p>
@@ -4284,7 +4356,7 @@
         <p:spPr>
           <a:xfrm>
             <a:off x="567542" y="1216429"/>
-            <a:ext cx="9417963" cy="830997"/>
+            <a:ext cx="9110186" cy="1938992"/>
           </a:xfrm>
           <a:prstGeom prst="rect">
             <a:avLst/>
@@ -4298,118 +4370,41 @@
           <a:lstStyle/>
           <a:p>
             <a:r>
-              <a:rPr kumimoji="1" lang="ja-JP" altLang="en-US" sz="2400" dirty="0"/>
-              <a:t>右側に実際に開始した日と、完了までにかかった日を入力します。</a:t>
-            </a:r>
-            <a:endParaRPr kumimoji="1" lang="en-US" altLang="ja-JP" sz="2400" dirty="0"/>
-          </a:p>
-          <a:p>
-            <a:r>
               <a:rPr lang="ja-JP" altLang="en-US" sz="2400" dirty="0"/>
-              <a:t>これは</a:t>
-            </a:r>
-            <a:r>
-              <a:rPr lang="ja-JP" altLang="en-US" sz="2400" b="1" dirty="0">
-                <a:solidFill>
-                  <a:srgbClr val="FF0000"/>
-                </a:solidFill>
-              </a:rPr>
-              <a:t>毎日帰宅前</a:t>
-            </a:r>
+              <a:t>授業で大量の時間を確保していますが、</a:t>
+            </a:r>
+            <a:endParaRPr lang="en-US" altLang="ja-JP" sz="2400" dirty="0"/>
+          </a:p>
+          <a:p>
             <a:r>
               <a:rPr lang="ja-JP" altLang="en-US" sz="2400" dirty="0"/>
-              <a:t>につけていきます。</a:t>
-            </a:r>
-            <a:endParaRPr kumimoji="1" lang="en-US" altLang="ja-JP" sz="2400" dirty="0"/>
-          </a:p>
-        </p:txBody>
-      </p:sp>
-      <p:pic>
-        <p:nvPicPr>
-          <p:cNvPr id="5" name="図 4">
-            <a:extLst>
-              <a:ext uri="{FF2B5EF4-FFF2-40B4-BE49-F238E27FC236}">
-                <a16:creationId xmlns:a16="http://schemas.microsoft.com/office/drawing/2014/main" id="{3B75878E-789F-4FE2-B159-6B1B7DE2CAF2}"/>
-              </a:ext>
-            </a:extLst>
-          </p:cNvPr>
-          <p:cNvPicPr>
-            <a:picLocks noChangeAspect="1"/>
-          </p:cNvPicPr>
-          <p:nvPr/>
-        </p:nvPicPr>
-        <p:blipFill>
-          <a:blip r:embed="rId2"/>
-          <a:stretch>
-            <a:fillRect/>
-          </a:stretch>
-        </p:blipFill>
-        <p:spPr>
-          <a:xfrm>
-            <a:off x="567542" y="2187126"/>
-            <a:ext cx="9693146" cy="4191492"/>
-          </a:xfrm>
-          <a:prstGeom prst="rect">
-            <a:avLst/>
-          </a:prstGeom>
-        </p:spPr>
-      </p:pic>
-      <p:sp>
-        <p:nvSpPr>
-          <p:cNvPr id="7" name="正方形/長方形 6">
-            <a:extLst>
-              <a:ext uri="{FF2B5EF4-FFF2-40B4-BE49-F238E27FC236}">
-                <a16:creationId xmlns:a16="http://schemas.microsoft.com/office/drawing/2014/main" id="{42409BA7-D966-4EFA-B248-AF9B507F803E}"/>
-              </a:ext>
-            </a:extLst>
-          </p:cNvPr>
-          <p:cNvSpPr/>
-          <p:nvPr/>
-        </p:nvSpPr>
-        <p:spPr>
-          <a:xfrm>
-            <a:off x="2616199" y="3141133"/>
-            <a:ext cx="1100667" cy="1921934"/>
-          </a:xfrm>
-          <a:prstGeom prst="rect">
-            <a:avLst/>
-          </a:prstGeom>
-          <a:noFill/>
-          <a:ln w="38100">
-            <a:solidFill>
-              <a:srgbClr val="FF0000"/>
-            </a:solidFill>
-          </a:ln>
-        </p:spPr>
-        <p:style>
-          <a:lnRef idx="2">
-            <a:schemeClr val="accent1">
-              <a:shade val="50000"/>
-            </a:schemeClr>
-          </a:lnRef>
-          <a:fillRef idx="1">
-            <a:schemeClr val="accent1"/>
-          </a:fillRef>
-          <a:effectRef idx="0">
-            <a:schemeClr val="accent1"/>
-          </a:effectRef>
-          <a:fontRef idx="minor">
-            <a:schemeClr val="lt1"/>
-          </a:fontRef>
-        </p:style>
-        <p:txBody>
-          <a:bodyPr rtlCol="0" anchor="ctr"/>
-          <a:lstStyle/>
-          <a:p>
-            <a:pPr algn="ctr"/>
-            <a:endParaRPr kumimoji="1" lang="ja-JP" altLang="en-US"/>
+              <a:t>授業時間のみで作品を完成させた学生は見たことがありません。</a:t>
+            </a:r>
+            <a:endParaRPr lang="en-US" altLang="ja-JP" sz="2400" dirty="0"/>
+          </a:p>
+          <a:p>
+            <a:endParaRPr lang="en-US" altLang="ja-JP" sz="2400" dirty="0"/>
+          </a:p>
+          <a:p>
+            <a:r>
+              <a:rPr lang="ja-JP" altLang="en-US" sz="2400" dirty="0"/>
+              <a:t>ゲームは時間をかけるほど良い作品になりますので、</a:t>
+            </a:r>
+            <a:endParaRPr lang="en-US" altLang="ja-JP" sz="2400" dirty="0"/>
+          </a:p>
+          <a:p>
+            <a:r>
+              <a:rPr lang="ja-JP" altLang="en-US" sz="2400" dirty="0"/>
+              <a:t>可能な限り放課後も残って作業しましょう。</a:t>
+            </a:r>
+            <a:endParaRPr lang="en-US" altLang="ja-JP" sz="2400" dirty="0"/>
           </a:p>
         </p:txBody>
       </p:sp>
     </p:spTree>
     <p:extLst>
       <p:ext uri="{BB962C8B-B14F-4D97-AF65-F5344CB8AC3E}">
-        <p14:creationId xmlns:p14="http://schemas.microsoft.com/office/powerpoint/2010/main" val="770311114"/>
+        <p14:creationId xmlns:p14="http://schemas.microsoft.com/office/powerpoint/2010/main" val="3733034544"/>
       </p:ext>
     </p:extLst>
   </p:cSld>
@@ -4438,10 +4433,10 @@
       </p:grpSpPr>
       <p:sp>
         <p:nvSpPr>
-          <p:cNvPr id="4" name="テキスト ボックス 3">
-            <a:extLst>
-              <a:ext uri="{FF2B5EF4-FFF2-40B4-BE49-F238E27FC236}">
-                <a16:creationId xmlns:a16="http://schemas.microsoft.com/office/drawing/2014/main" id="{5A13BF46-B8C5-48AA-8308-C9ECFF431A18}"/>
+          <p:cNvPr id="6" name="テキスト ボックス 5">
+            <a:extLst>
+              <a:ext uri="{FF2B5EF4-FFF2-40B4-BE49-F238E27FC236}">
+                <a16:creationId xmlns:a16="http://schemas.microsoft.com/office/drawing/2014/main" id="{55830AD6-028B-4C4E-80BF-B70DFC1C3A46}"/>
               </a:ext>
             </a:extLst>
           </p:cNvPr>
@@ -4450,8 +4445,8 @@
         </p:nvSpPr>
         <p:spPr>
           <a:xfrm>
-            <a:off x="567542" y="491954"/>
-            <a:ext cx="1826141" cy="584775"/>
+            <a:off x="3849231" y="3013502"/>
+            <a:ext cx="4493538" cy="830997"/>
           </a:xfrm>
           <a:prstGeom prst="rect">
             <a:avLst/>
@@ -4465,947 +4460,17 @@
           <a:lstStyle/>
           <a:p>
             <a:r>
-              <a:rPr kumimoji="1" lang="ja-JP" altLang="en-US" sz="3200" b="1" u="sng" dirty="0"/>
-              <a:t>就職作品</a:t>
-            </a:r>
-            <a:endParaRPr kumimoji="1" lang="en-US" altLang="ja-JP" sz="3200" b="1" u="sng" dirty="0"/>
-          </a:p>
-        </p:txBody>
-      </p:sp>
-      <p:sp>
-        <p:nvSpPr>
-          <p:cNvPr id="6" name="テキスト ボックス 5">
-            <a:extLst>
-              <a:ext uri="{FF2B5EF4-FFF2-40B4-BE49-F238E27FC236}">
-                <a16:creationId xmlns:a16="http://schemas.microsoft.com/office/drawing/2014/main" id="{55830AD6-028B-4C4E-80BF-B70DFC1C3A46}"/>
-              </a:ext>
-            </a:extLst>
-          </p:cNvPr>
-          <p:cNvSpPr txBox="1"/>
-          <p:nvPr/>
-        </p:nvSpPr>
-        <p:spPr>
-          <a:xfrm>
-            <a:off x="567542" y="1216429"/>
-            <a:ext cx="10649069" cy="830997"/>
-          </a:xfrm>
-          <a:prstGeom prst="rect">
-            <a:avLst/>
-          </a:prstGeom>
-          <a:noFill/>
-        </p:spPr>
-        <p:txBody>
-          <a:bodyPr wrap="none" rtlCol="0">
-            <a:spAutoFit/>
-          </a:bodyPr>
-          <a:lstStyle/>
-          <a:p>
-            <a:r>
-              <a:rPr kumimoji="1" lang="ja-JP" altLang="en-US" sz="2400" dirty="0"/>
-              <a:t>自動でグラフが生成されます。</a:t>
-            </a:r>
-            <a:r>
-              <a:rPr kumimoji="1" lang="ja-JP" altLang="en-US" sz="2400" b="1" dirty="0">
-                <a:solidFill>
-                  <a:srgbClr val="FF0000"/>
-                </a:solidFill>
-              </a:rPr>
-              <a:t>黄色の部分が予定通りに進んでいない</a:t>
-            </a:r>
-            <a:r>
-              <a:rPr kumimoji="1" lang="ja-JP" altLang="en-US" sz="2400" dirty="0"/>
-              <a:t>ので、</a:t>
-            </a:r>
-            <a:endParaRPr kumimoji="1" lang="en-US" altLang="ja-JP" sz="2400" dirty="0"/>
-          </a:p>
-          <a:p>
-            <a:r>
-              <a:rPr lang="ja-JP" altLang="en-US" sz="2400" dirty="0"/>
-              <a:t>対策を考える必要が出てきます。</a:t>
-            </a:r>
-            <a:endParaRPr kumimoji="1" lang="en-US" altLang="ja-JP" sz="2400" dirty="0"/>
-          </a:p>
-        </p:txBody>
-      </p:sp>
-      <p:pic>
-        <p:nvPicPr>
-          <p:cNvPr id="5" name="図 4">
-            <a:extLst>
-              <a:ext uri="{FF2B5EF4-FFF2-40B4-BE49-F238E27FC236}">
-                <a16:creationId xmlns:a16="http://schemas.microsoft.com/office/drawing/2014/main" id="{3B75878E-789F-4FE2-B159-6B1B7DE2CAF2}"/>
-              </a:ext>
-            </a:extLst>
-          </p:cNvPr>
-          <p:cNvPicPr>
-            <a:picLocks noChangeAspect="1"/>
-          </p:cNvPicPr>
-          <p:nvPr/>
-        </p:nvPicPr>
-        <p:blipFill>
-          <a:blip r:embed="rId2"/>
-          <a:stretch>
-            <a:fillRect/>
-          </a:stretch>
-        </p:blipFill>
-        <p:spPr>
-          <a:xfrm>
-            <a:off x="567542" y="2187126"/>
-            <a:ext cx="9693146" cy="4191492"/>
-          </a:xfrm>
-          <a:prstGeom prst="rect">
-            <a:avLst/>
-          </a:prstGeom>
-        </p:spPr>
-      </p:pic>
-      <p:sp>
-        <p:nvSpPr>
-          <p:cNvPr id="7" name="正方形/長方形 6">
-            <a:extLst>
-              <a:ext uri="{FF2B5EF4-FFF2-40B4-BE49-F238E27FC236}">
-                <a16:creationId xmlns:a16="http://schemas.microsoft.com/office/drawing/2014/main" id="{42409BA7-D966-4EFA-B248-AF9B507F803E}"/>
-              </a:ext>
-            </a:extLst>
-          </p:cNvPr>
-          <p:cNvSpPr/>
-          <p:nvPr/>
-        </p:nvSpPr>
-        <p:spPr>
-          <a:xfrm>
-            <a:off x="4313448" y="3242732"/>
-            <a:ext cx="6176752" cy="3275585"/>
-          </a:xfrm>
-          <a:prstGeom prst="rect">
-            <a:avLst/>
-          </a:prstGeom>
-          <a:noFill/>
-          <a:ln w="38100">
-            <a:solidFill>
-              <a:srgbClr val="FF0000"/>
-            </a:solidFill>
-          </a:ln>
-        </p:spPr>
-        <p:style>
-          <a:lnRef idx="2">
-            <a:schemeClr val="accent1">
-              <a:shade val="50000"/>
-            </a:schemeClr>
-          </a:lnRef>
-          <a:fillRef idx="1">
-            <a:schemeClr val="accent1"/>
-          </a:fillRef>
-          <a:effectRef idx="0">
-            <a:schemeClr val="accent1"/>
-          </a:effectRef>
-          <a:fontRef idx="minor">
-            <a:schemeClr val="lt1"/>
-          </a:fontRef>
-        </p:style>
-        <p:txBody>
-          <a:bodyPr rtlCol="0" anchor="ctr"/>
-          <a:lstStyle/>
-          <a:p>
-            <a:pPr algn="ctr"/>
-            <a:endParaRPr kumimoji="1" lang="ja-JP" altLang="en-US"/>
+              <a:rPr lang="ja-JP" altLang="en-US" sz="4800" b="1" dirty="0"/>
+              <a:t>内定者作品動画</a:t>
+            </a:r>
+            <a:endParaRPr lang="en-US" altLang="ja-JP" sz="4800" b="1" dirty="0"/>
           </a:p>
         </p:txBody>
       </p:sp>
     </p:spTree>
     <p:extLst>
       <p:ext uri="{BB962C8B-B14F-4D97-AF65-F5344CB8AC3E}">
-        <p14:creationId xmlns:p14="http://schemas.microsoft.com/office/powerpoint/2010/main" val="1731839467"/>
-      </p:ext>
-    </p:extLst>
-  </p:cSld>
-  <p:clrMapOvr>
-    <a:masterClrMapping/>
-  </p:clrMapOvr>
-</p:sld>
-</file>
-
-<file path=ppt/slides/slide7.xml><?xml version="1.0" encoding="utf-8"?>
-<p:sld xmlns:a="http://schemas.openxmlformats.org/drawingml/2006/main" xmlns:r="http://schemas.openxmlformats.org/officeDocument/2006/relationships" xmlns:p="http://schemas.openxmlformats.org/presentationml/2006/main">
-  <p:cSld>
-    <p:spTree>
-      <p:nvGrpSpPr>
-        <p:cNvPr id="1" name=""/>
-        <p:cNvGrpSpPr/>
-        <p:nvPr/>
-      </p:nvGrpSpPr>
-      <p:grpSpPr>
-        <a:xfrm>
-          <a:off x="0" y="0"/>
-          <a:ext cx="0" cy="0"/>
-          <a:chOff x="0" y="0"/>
-          <a:chExt cx="0" cy="0"/>
-        </a:xfrm>
-      </p:grpSpPr>
-      <p:sp>
-        <p:nvSpPr>
-          <p:cNvPr id="4" name="テキスト ボックス 3">
-            <a:extLst>
-              <a:ext uri="{FF2B5EF4-FFF2-40B4-BE49-F238E27FC236}">
-                <a16:creationId xmlns:a16="http://schemas.microsoft.com/office/drawing/2014/main" id="{5A13BF46-B8C5-48AA-8308-C9ECFF431A18}"/>
-              </a:ext>
-            </a:extLst>
-          </p:cNvPr>
-          <p:cNvSpPr txBox="1"/>
-          <p:nvPr/>
-        </p:nvSpPr>
-        <p:spPr>
-          <a:xfrm>
-            <a:off x="567542" y="491954"/>
-            <a:ext cx="1826141" cy="584775"/>
-          </a:xfrm>
-          <a:prstGeom prst="rect">
-            <a:avLst/>
-          </a:prstGeom>
-          <a:noFill/>
-        </p:spPr>
-        <p:txBody>
-          <a:bodyPr wrap="none" rtlCol="0">
-            <a:spAutoFit/>
-          </a:bodyPr>
-          <a:lstStyle/>
-          <a:p>
-            <a:r>
-              <a:rPr kumimoji="1" lang="ja-JP" altLang="en-US" sz="3200" b="1" u="sng" dirty="0"/>
-              <a:t>就職作品</a:t>
-            </a:r>
-            <a:endParaRPr kumimoji="1" lang="en-US" altLang="ja-JP" sz="3200" b="1" u="sng" dirty="0"/>
-          </a:p>
-        </p:txBody>
-      </p:sp>
-      <p:sp>
-        <p:nvSpPr>
-          <p:cNvPr id="6" name="テキスト ボックス 5">
-            <a:extLst>
-              <a:ext uri="{FF2B5EF4-FFF2-40B4-BE49-F238E27FC236}">
-                <a16:creationId xmlns:a16="http://schemas.microsoft.com/office/drawing/2014/main" id="{55830AD6-028B-4C4E-80BF-B70DFC1C3A46}"/>
-              </a:ext>
-            </a:extLst>
-          </p:cNvPr>
-          <p:cNvSpPr txBox="1"/>
-          <p:nvPr/>
-        </p:nvSpPr>
-        <p:spPr>
-          <a:xfrm>
-            <a:off x="567542" y="1216429"/>
-            <a:ext cx="10033516" cy="830997"/>
-          </a:xfrm>
-          <a:prstGeom prst="rect">
-            <a:avLst/>
-          </a:prstGeom>
-          <a:noFill/>
-        </p:spPr>
-        <p:txBody>
-          <a:bodyPr wrap="none" rtlCol="0">
-            <a:spAutoFit/>
-          </a:bodyPr>
-          <a:lstStyle/>
-          <a:p>
-            <a:r>
-              <a:rPr kumimoji="1" lang="ja-JP" altLang="en-US" sz="2400" dirty="0"/>
-              <a:t>洗い出した要素を参考に必要な作業をアクティビティに書きましょう。</a:t>
-            </a:r>
-            <a:endParaRPr kumimoji="1" lang="en-US" altLang="ja-JP" sz="2400" dirty="0"/>
-          </a:p>
-          <a:p>
-            <a:r>
-              <a:rPr lang="ja-JP" altLang="en-US" sz="2400" dirty="0"/>
-              <a:t>そして計画開始日と計画継続期間を埋めていきましょう。</a:t>
-            </a:r>
-            <a:endParaRPr kumimoji="1" lang="en-US" altLang="ja-JP" sz="2400" dirty="0"/>
-          </a:p>
-        </p:txBody>
-      </p:sp>
-      <p:pic>
-        <p:nvPicPr>
-          <p:cNvPr id="5" name="図 4">
-            <a:extLst>
-              <a:ext uri="{FF2B5EF4-FFF2-40B4-BE49-F238E27FC236}">
-                <a16:creationId xmlns:a16="http://schemas.microsoft.com/office/drawing/2014/main" id="{3B75878E-789F-4FE2-B159-6B1B7DE2CAF2}"/>
-              </a:ext>
-            </a:extLst>
-          </p:cNvPr>
-          <p:cNvPicPr>
-            <a:picLocks noChangeAspect="1"/>
-          </p:cNvPicPr>
-          <p:nvPr/>
-        </p:nvPicPr>
-        <p:blipFill>
-          <a:blip r:embed="rId2"/>
-          <a:stretch>
-            <a:fillRect/>
-          </a:stretch>
-        </p:blipFill>
-        <p:spPr>
-          <a:xfrm>
-            <a:off x="567542" y="2187126"/>
-            <a:ext cx="9693146" cy="4191492"/>
-          </a:xfrm>
-          <a:prstGeom prst="rect">
-            <a:avLst/>
-          </a:prstGeom>
-        </p:spPr>
-      </p:pic>
-      <p:sp>
-        <p:nvSpPr>
-          <p:cNvPr id="7" name="正方形/長方形 6">
-            <a:extLst>
-              <a:ext uri="{FF2B5EF4-FFF2-40B4-BE49-F238E27FC236}">
-                <a16:creationId xmlns:a16="http://schemas.microsoft.com/office/drawing/2014/main" id="{42409BA7-D966-4EFA-B248-AF9B507F803E}"/>
-              </a:ext>
-            </a:extLst>
-          </p:cNvPr>
-          <p:cNvSpPr/>
-          <p:nvPr/>
-        </p:nvSpPr>
-        <p:spPr>
-          <a:xfrm>
-            <a:off x="444181" y="3172782"/>
-            <a:ext cx="2180486" cy="1915685"/>
-          </a:xfrm>
-          <a:prstGeom prst="rect">
-            <a:avLst/>
-          </a:prstGeom>
-          <a:noFill/>
-          <a:ln w="38100">
-            <a:solidFill>
-              <a:srgbClr val="FF0000"/>
-            </a:solidFill>
-          </a:ln>
-        </p:spPr>
-        <p:style>
-          <a:lnRef idx="2">
-            <a:schemeClr val="accent1">
-              <a:shade val="50000"/>
-            </a:schemeClr>
-          </a:lnRef>
-          <a:fillRef idx="1">
-            <a:schemeClr val="accent1"/>
-          </a:fillRef>
-          <a:effectRef idx="0">
-            <a:schemeClr val="accent1"/>
-          </a:effectRef>
-          <a:fontRef idx="minor">
-            <a:schemeClr val="lt1"/>
-          </a:fontRef>
-        </p:style>
-        <p:txBody>
-          <a:bodyPr rtlCol="0" anchor="ctr"/>
-          <a:lstStyle/>
-          <a:p>
-            <a:pPr algn="ctr"/>
-            <a:endParaRPr kumimoji="1" lang="ja-JP" altLang="en-US"/>
-          </a:p>
-        </p:txBody>
-      </p:sp>
-    </p:spTree>
-    <p:extLst>
-      <p:ext uri="{BB962C8B-B14F-4D97-AF65-F5344CB8AC3E}">
-        <p14:creationId xmlns:p14="http://schemas.microsoft.com/office/powerpoint/2010/main" val="968822993"/>
-      </p:ext>
-    </p:extLst>
-  </p:cSld>
-  <p:clrMapOvr>
-    <a:masterClrMapping/>
-  </p:clrMapOvr>
-</p:sld>
-</file>
-
-<file path=ppt/slides/slide8.xml><?xml version="1.0" encoding="utf-8"?>
-<p:sld xmlns:a="http://schemas.openxmlformats.org/drawingml/2006/main" xmlns:r="http://schemas.openxmlformats.org/officeDocument/2006/relationships" xmlns:p="http://schemas.openxmlformats.org/presentationml/2006/main">
-  <p:cSld>
-    <p:spTree>
-      <p:nvGrpSpPr>
-        <p:cNvPr id="1" name=""/>
-        <p:cNvGrpSpPr/>
-        <p:nvPr/>
-      </p:nvGrpSpPr>
-      <p:grpSpPr>
-        <a:xfrm>
-          <a:off x="0" y="0"/>
-          <a:ext cx="0" cy="0"/>
-          <a:chOff x="0" y="0"/>
-          <a:chExt cx="0" cy="0"/>
-        </a:xfrm>
-      </p:grpSpPr>
-      <p:sp>
-        <p:nvSpPr>
-          <p:cNvPr id="4" name="テキスト ボックス 3">
-            <a:extLst>
-              <a:ext uri="{FF2B5EF4-FFF2-40B4-BE49-F238E27FC236}">
-                <a16:creationId xmlns:a16="http://schemas.microsoft.com/office/drawing/2014/main" id="{5A13BF46-B8C5-48AA-8308-C9ECFF431A18}"/>
-              </a:ext>
-            </a:extLst>
-          </p:cNvPr>
-          <p:cNvSpPr txBox="1"/>
-          <p:nvPr/>
-        </p:nvSpPr>
-        <p:spPr>
-          <a:xfrm>
-            <a:off x="567542" y="491954"/>
-            <a:ext cx="1826141" cy="584775"/>
-          </a:xfrm>
-          <a:prstGeom prst="rect">
-            <a:avLst/>
-          </a:prstGeom>
-          <a:noFill/>
-        </p:spPr>
-        <p:txBody>
-          <a:bodyPr wrap="none" rtlCol="0">
-            <a:spAutoFit/>
-          </a:bodyPr>
-          <a:lstStyle/>
-          <a:p>
-            <a:r>
-              <a:rPr kumimoji="1" lang="ja-JP" altLang="en-US" sz="3200" b="1" u="sng" dirty="0"/>
-              <a:t>就職作品</a:t>
-            </a:r>
-            <a:endParaRPr kumimoji="1" lang="en-US" altLang="ja-JP" sz="3200" b="1" u="sng" dirty="0"/>
-          </a:p>
-        </p:txBody>
-      </p:sp>
-      <p:sp>
-        <p:nvSpPr>
-          <p:cNvPr id="6" name="テキスト ボックス 5">
-            <a:extLst>
-              <a:ext uri="{FF2B5EF4-FFF2-40B4-BE49-F238E27FC236}">
-                <a16:creationId xmlns:a16="http://schemas.microsoft.com/office/drawing/2014/main" id="{55830AD6-028B-4C4E-80BF-B70DFC1C3A46}"/>
-              </a:ext>
-            </a:extLst>
-          </p:cNvPr>
-          <p:cNvSpPr txBox="1"/>
-          <p:nvPr/>
-        </p:nvSpPr>
-        <p:spPr>
-          <a:xfrm>
-            <a:off x="567542" y="1216429"/>
-            <a:ext cx="8802410" cy="1938992"/>
-          </a:xfrm>
-          <a:prstGeom prst="rect">
-            <a:avLst/>
-          </a:prstGeom>
-          <a:noFill/>
-        </p:spPr>
-        <p:txBody>
-          <a:bodyPr wrap="none" rtlCol="0">
-            <a:spAutoFit/>
-          </a:bodyPr>
-          <a:lstStyle/>
-          <a:p>
-            <a:r>
-              <a:rPr kumimoji="1" lang="ja-JP" altLang="en-US" sz="2400" dirty="0"/>
-              <a:t>膨大な量になりますが、</a:t>
-            </a:r>
-            <a:endParaRPr kumimoji="1" lang="en-US" altLang="ja-JP" sz="2400" dirty="0"/>
-          </a:p>
-          <a:p>
-            <a:r>
-              <a:rPr lang="ja-JP" altLang="en-US" sz="2400" dirty="0"/>
-              <a:t>ここで</a:t>
-            </a:r>
-            <a:r>
-              <a:rPr lang="ja-JP" altLang="en-US" sz="2400" b="1" dirty="0">
-                <a:solidFill>
-                  <a:srgbClr val="FF0000"/>
-                </a:solidFill>
-              </a:rPr>
-              <a:t>漏れ、抜けがないほど計画通りに制作が進みます。</a:t>
-            </a:r>
-            <a:endParaRPr lang="en-US" altLang="ja-JP" sz="2400" b="1" dirty="0">
-              <a:solidFill>
-                <a:srgbClr val="FF0000"/>
-              </a:solidFill>
-            </a:endParaRPr>
-          </a:p>
-          <a:p>
-            <a:r>
-              <a:rPr kumimoji="1" lang="ja-JP" altLang="en-US" sz="2400" dirty="0"/>
-              <a:t>じっくり時間をかけて作成しましょう。</a:t>
-            </a:r>
-            <a:endParaRPr kumimoji="1" lang="en-US" altLang="ja-JP" sz="2400" dirty="0"/>
-          </a:p>
-          <a:p>
-            <a:endParaRPr lang="en-US" altLang="ja-JP" sz="2400" dirty="0"/>
-          </a:p>
-          <a:p>
-            <a:r>
-              <a:rPr kumimoji="1" lang="en-US" altLang="ja-JP" sz="2400" dirty="0"/>
-              <a:t>※</a:t>
-            </a:r>
-            <a:r>
-              <a:rPr kumimoji="1" lang="ja-JP" altLang="en-US" sz="2400" dirty="0"/>
-              <a:t>かといって最初から完璧なものはできないので、ほどほどで</a:t>
-            </a:r>
-            <a:endParaRPr kumimoji="1" lang="en-US" altLang="ja-JP" sz="2400" dirty="0"/>
-          </a:p>
-        </p:txBody>
-      </p:sp>
-    </p:spTree>
-    <p:extLst>
-      <p:ext uri="{BB962C8B-B14F-4D97-AF65-F5344CB8AC3E}">
-        <p14:creationId xmlns:p14="http://schemas.microsoft.com/office/powerpoint/2010/main" val="1324535630"/>
-      </p:ext>
-    </p:extLst>
-  </p:cSld>
-  <p:clrMapOvr>
-    <a:masterClrMapping/>
-  </p:clrMapOvr>
-</p:sld>
-</file>
-
-<file path=ppt/slides/slide9.xml><?xml version="1.0" encoding="utf-8"?>
-<p:sld xmlns:a="http://schemas.openxmlformats.org/drawingml/2006/main" xmlns:r="http://schemas.openxmlformats.org/officeDocument/2006/relationships" xmlns:p="http://schemas.openxmlformats.org/presentationml/2006/main">
-  <p:cSld>
-    <p:spTree>
-      <p:nvGrpSpPr>
-        <p:cNvPr id="1" name=""/>
-        <p:cNvGrpSpPr/>
-        <p:nvPr/>
-      </p:nvGrpSpPr>
-      <p:grpSpPr>
-        <a:xfrm>
-          <a:off x="0" y="0"/>
-          <a:ext cx="0" cy="0"/>
-          <a:chOff x="0" y="0"/>
-          <a:chExt cx="0" cy="0"/>
-        </a:xfrm>
-      </p:grpSpPr>
-      <p:sp>
-        <p:nvSpPr>
-          <p:cNvPr id="4" name="テキスト ボックス 3">
-            <a:extLst>
-              <a:ext uri="{FF2B5EF4-FFF2-40B4-BE49-F238E27FC236}">
-                <a16:creationId xmlns:a16="http://schemas.microsoft.com/office/drawing/2014/main" id="{5A13BF46-B8C5-48AA-8308-C9ECFF431A18}"/>
-              </a:ext>
-            </a:extLst>
-          </p:cNvPr>
-          <p:cNvSpPr txBox="1"/>
-          <p:nvPr/>
-        </p:nvSpPr>
-        <p:spPr>
-          <a:xfrm>
-            <a:off x="567542" y="491954"/>
-            <a:ext cx="1826141" cy="584775"/>
-          </a:xfrm>
-          <a:prstGeom prst="rect">
-            <a:avLst/>
-          </a:prstGeom>
-          <a:noFill/>
-        </p:spPr>
-        <p:txBody>
-          <a:bodyPr wrap="none" rtlCol="0">
-            <a:spAutoFit/>
-          </a:bodyPr>
-          <a:lstStyle/>
-          <a:p>
-            <a:r>
-              <a:rPr kumimoji="1" lang="ja-JP" altLang="en-US" sz="3200" b="1" u="sng" dirty="0"/>
-              <a:t>就職作品</a:t>
-            </a:r>
-            <a:endParaRPr kumimoji="1" lang="en-US" altLang="ja-JP" sz="3200" b="1" u="sng" dirty="0"/>
-          </a:p>
-        </p:txBody>
-      </p:sp>
-      <p:sp>
-        <p:nvSpPr>
-          <p:cNvPr id="6" name="テキスト ボックス 5">
-            <a:extLst>
-              <a:ext uri="{FF2B5EF4-FFF2-40B4-BE49-F238E27FC236}">
-                <a16:creationId xmlns:a16="http://schemas.microsoft.com/office/drawing/2014/main" id="{55830AD6-028B-4C4E-80BF-B70DFC1C3A46}"/>
-              </a:ext>
-            </a:extLst>
-          </p:cNvPr>
-          <p:cNvSpPr txBox="1"/>
-          <p:nvPr/>
-        </p:nvSpPr>
-        <p:spPr>
-          <a:xfrm>
-            <a:off x="567542" y="1216429"/>
-            <a:ext cx="10341293" cy="1569660"/>
-          </a:xfrm>
-          <a:prstGeom prst="rect">
-            <a:avLst/>
-          </a:prstGeom>
-          <a:noFill/>
-        </p:spPr>
-        <p:txBody>
-          <a:bodyPr wrap="none" rtlCol="0">
-            <a:spAutoFit/>
-          </a:bodyPr>
-          <a:lstStyle/>
-          <a:p>
-            <a:r>
-              <a:rPr kumimoji="1" lang="ja-JP" altLang="en-US" sz="2400" dirty="0"/>
-              <a:t>ゲーム開発</a:t>
-            </a:r>
-            <a:r>
-              <a:rPr kumimoji="1" lang="en-US" altLang="ja-JP" sz="2400" dirty="0"/>
-              <a:t>Ⅱ</a:t>
-            </a:r>
-            <a:r>
-              <a:rPr kumimoji="1" lang="ja-JP" altLang="en-US" sz="2400" dirty="0"/>
-              <a:t>では就職作品の</a:t>
-            </a:r>
-            <a:r>
-              <a:rPr kumimoji="1" lang="en-US" altLang="ja-JP" sz="2400" b="1" dirty="0">
-                <a:solidFill>
-                  <a:srgbClr val="FF0000"/>
-                </a:solidFill>
-              </a:rPr>
-              <a:t>α</a:t>
-            </a:r>
-            <a:r>
-              <a:rPr kumimoji="1" lang="ja-JP" altLang="en-US" sz="2400" b="1" dirty="0">
-                <a:solidFill>
-                  <a:srgbClr val="FF0000"/>
-                </a:solidFill>
-              </a:rPr>
-              <a:t>版で効果測定</a:t>
-            </a:r>
-            <a:r>
-              <a:rPr kumimoji="1" lang="ja-JP" altLang="en-US" sz="2400" dirty="0"/>
-              <a:t>を行います。</a:t>
-            </a:r>
-            <a:endParaRPr kumimoji="1" lang="en-US" altLang="ja-JP" sz="2400" dirty="0"/>
-          </a:p>
-          <a:p>
-            <a:r>
-              <a:rPr lang="en-US" altLang="ja-JP" sz="2400" dirty="0"/>
-              <a:t>α</a:t>
-            </a:r>
-            <a:r>
-              <a:rPr lang="ja-JP" altLang="en-US" sz="2400" dirty="0"/>
-              <a:t>版とは、</a:t>
-            </a:r>
-            <a:r>
-              <a:rPr lang="ja-JP" altLang="en-US" sz="2400" b="1" dirty="0">
-                <a:solidFill>
-                  <a:srgbClr val="FF0000"/>
-                </a:solidFill>
-              </a:rPr>
-              <a:t>ゲームを遊ぶための機能がすべて実装されたバージョン</a:t>
-            </a:r>
-            <a:r>
-              <a:rPr lang="ja-JP" altLang="en-US" sz="2400" dirty="0"/>
-              <a:t>です。</a:t>
-            </a:r>
-            <a:endParaRPr lang="en-US" altLang="ja-JP" sz="2400" dirty="0"/>
-          </a:p>
-          <a:p>
-            <a:endParaRPr kumimoji="1" lang="en-US" altLang="ja-JP" sz="2400" dirty="0"/>
-          </a:p>
-          <a:p>
-            <a:r>
-              <a:rPr lang="ja-JP" altLang="en-US" sz="2400" b="1" dirty="0">
-                <a:solidFill>
-                  <a:srgbClr val="FF0000"/>
-                </a:solidFill>
-              </a:rPr>
-              <a:t>■スーパーマリオブラザーズの例</a:t>
-            </a:r>
-            <a:endParaRPr kumimoji="1" lang="en-US" altLang="ja-JP" sz="2400" b="1" dirty="0">
-              <a:solidFill>
-                <a:srgbClr val="FF0000"/>
-              </a:solidFill>
-            </a:endParaRPr>
-          </a:p>
-        </p:txBody>
-      </p:sp>
-      <p:sp>
-        <p:nvSpPr>
-          <p:cNvPr id="2" name="四角形: 角を丸くする 1">
-            <a:extLst>
-              <a:ext uri="{FF2B5EF4-FFF2-40B4-BE49-F238E27FC236}">
-                <a16:creationId xmlns:a16="http://schemas.microsoft.com/office/drawing/2014/main" id="{B07BB018-EB2B-4DCF-A6FF-B207E9CF244B}"/>
-              </a:ext>
-            </a:extLst>
-          </p:cNvPr>
-          <p:cNvSpPr/>
-          <p:nvPr/>
-        </p:nvSpPr>
-        <p:spPr>
-          <a:xfrm>
-            <a:off x="567542" y="2786089"/>
-            <a:ext cx="4739564" cy="3964335"/>
-          </a:xfrm>
-          <a:prstGeom prst="roundRect">
-            <a:avLst/>
-          </a:prstGeom>
-        </p:spPr>
-        <p:style>
-          <a:lnRef idx="2">
-            <a:schemeClr val="accent2">
-              <a:shade val="50000"/>
-            </a:schemeClr>
-          </a:lnRef>
-          <a:fillRef idx="1">
-            <a:schemeClr val="accent2"/>
-          </a:fillRef>
-          <a:effectRef idx="0">
-            <a:schemeClr val="accent2"/>
-          </a:effectRef>
-          <a:fontRef idx="minor">
-            <a:schemeClr val="lt1"/>
-          </a:fontRef>
-        </p:style>
-        <p:txBody>
-          <a:bodyPr rtlCol="0" anchor="ctr"/>
-          <a:lstStyle/>
-          <a:p>
-            <a:pPr algn="ctr"/>
-            <a:r>
-              <a:rPr kumimoji="1" lang="en-US" altLang="ja-JP" b="1" dirty="0"/>
-              <a:t>α</a:t>
-            </a:r>
-            <a:r>
-              <a:rPr kumimoji="1" lang="ja-JP" altLang="en-US" b="1" dirty="0"/>
-              <a:t>版に含まれるもの</a:t>
-            </a:r>
-            <a:endParaRPr kumimoji="1" lang="en-US" altLang="ja-JP" b="1" dirty="0"/>
-          </a:p>
-          <a:p>
-            <a:endParaRPr lang="en-US" altLang="ja-JP" dirty="0"/>
-          </a:p>
-          <a:p>
-            <a:r>
-              <a:rPr kumimoji="1" lang="ja-JP" altLang="en-US" sz="1600" dirty="0"/>
-              <a:t>・マリオ</a:t>
-            </a:r>
-            <a:endParaRPr kumimoji="1" lang="en-US" altLang="ja-JP" sz="1600" dirty="0"/>
-          </a:p>
-          <a:p>
-            <a:r>
-              <a:rPr lang="ja-JP" altLang="en-US" sz="1600" dirty="0"/>
-              <a:t>　・移動、しゃがみ、ジャンプ、</a:t>
-            </a:r>
-            <a:r>
-              <a:rPr lang="en-US" altLang="ja-JP" sz="1600" dirty="0"/>
-              <a:t>B</a:t>
-            </a:r>
-            <a:r>
-              <a:rPr lang="ja-JP" altLang="en-US" sz="1600" dirty="0"/>
-              <a:t>ダッシュ</a:t>
-            </a:r>
-            <a:endParaRPr kumimoji="1" lang="en-US" altLang="ja-JP" sz="1600" dirty="0"/>
-          </a:p>
-          <a:p>
-            <a:r>
-              <a:rPr kumimoji="1" lang="ja-JP" altLang="en-US" sz="1600" dirty="0"/>
-              <a:t>・クリボー</a:t>
-            </a:r>
-            <a:endParaRPr kumimoji="1" lang="en-US" altLang="ja-JP" sz="1600" dirty="0"/>
-          </a:p>
-          <a:p>
-            <a:r>
-              <a:rPr lang="ja-JP" altLang="en-US" sz="1600" dirty="0"/>
-              <a:t>　・移動</a:t>
-            </a:r>
-            <a:endParaRPr lang="en-US" altLang="ja-JP" sz="1600" dirty="0"/>
-          </a:p>
-          <a:p>
-            <a:r>
-              <a:rPr kumimoji="1" lang="ja-JP" altLang="en-US" sz="1600" dirty="0"/>
-              <a:t>・パタクリボー</a:t>
-            </a:r>
-            <a:endParaRPr kumimoji="1" lang="en-US" altLang="ja-JP" sz="1600" dirty="0"/>
-          </a:p>
-          <a:p>
-            <a:r>
-              <a:rPr lang="ja-JP" altLang="en-US" sz="1600" dirty="0"/>
-              <a:t>　・移動、ジャンプ、羽が取れる</a:t>
-            </a:r>
-            <a:endParaRPr lang="en-US" altLang="ja-JP" sz="1600" dirty="0"/>
-          </a:p>
-          <a:p>
-            <a:r>
-              <a:rPr kumimoji="1" lang="ja-JP" altLang="en-US" sz="1600" dirty="0"/>
-              <a:t>・システム</a:t>
-            </a:r>
-            <a:endParaRPr kumimoji="1" lang="en-US" altLang="ja-JP" sz="1600" dirty="0"/>
-          </a:p>
-          <a:p>
-            <a:r>
-              <a:rPr lang="ja-JP" altLang="en-US" sz="1600" dirty="0"/>
-              <a:t>　・当たり判定</a:t>
-            </a:r>
-            <a:endParaRPr lang="en-US" altLang="ja-JP" sz="1600" dirty="0"/>
-          </a:p>
-          <a:p>
-            <a:r>
-              <a:rPr kumimoji="1" lang="ja-JP" altLang="en-US" sz="1600" dirty="0"/>
-              <a:t>　・</a:t>
-            </a:r>
-            <a:r>
-              <a:rPr lang="ja-JP" altLang="en-US" sz="1600" dirty="0"/>
-              <a:t>残機</a:t>
-            </a:r>
-            <a:endParaRPr lang="en-US" altLang="ja-JP" sz="1600" dirty="0"/>
-          </a:p>
-          <a:p>
-            <a:r>
-              <a:rPr kumimoji="1" lang="ja-JP" altLang="en-US" sz="1600" dirty="0"/>
-              <a:t>　・スコア</a:t>
-            </a:r>
-            <a:endParaRPr kumimoji="1" lang="en-US" altLang="ja-JP" sz="1600" dirty="0"/>
-          </a:p>
-          <a:p>
-            <a:r>
-              <a:rPr lang="ja-JP" altLang="en-US" sz="1600" dirty="0"/>
-              <a:t>　・ゴール、ゴール花火</a:t>
-            </a:r>
-            <a:endParaRPr lang="en-US" altLang="ja-JP" sz="1600" dirty="0"/>
-          </a:p>
-          <a:p>
-            <a:r>
-              <a:rPr kumimoji="1" lang="ja-JP" altLang="en-US" sz="1600" dirty="0"/>
-              <a:t>　・落下死</a:t>
-            </a:r>
-            <a:endParaRPr kumimoji="1" lang="en-US" altLang="ja-JP" sz="1600" dirty="0"/>
-          </a:p>
-          <a:p>
-            <a:r>
-              <a:rPr lang="ja-JP" altLang="en-US" sz="1600" dirty="0"/>
-              <a:t>　・シーン遷移</a:t>
-            </a:r>
-            <a:endParaRPr kumimoji="1" lang="ja-JP" altLang="en-US" sz="1600" dirty="0"/>
-          </a:p>
-        </p:txBody>
-      </p:sp>
-      <p:sp>
-        <p:nvSpPr>
-          <p:cNvPr id="5" name="四角形: 角を丸くする 4">
-            <a:extLst>
-              <a:ext uri="{FF2B5EF4-FFF2-40B4-BE49-F238E27FC236}">
-                <a16:creationId xmlns:a16="http://schemas.microsoft.com/office/drawing/2014/main" id="{272C7D20-AD8E-4F1C-B5B0-788B6021964B}"/>
-              </a:ext>
-            </a:extLst>
-          </p:cNvPr>
-          <p:cNvSpPr/>
-          <p:nvPr/>
-        </p:nvSpPr>
-        <p:spPr>
-          <a:xfrm>
-            <a:off x="5738188" y="2786089"/>
-            <a:ext cx="4739564" cy="3964335"/>
-          </a:xfrm>
-          <a:prstGeom prst="roundRect">
-            <a:avLst/>
-          </a:prstGeom>
-        </p:spPr>
-        <p:style>
-          <a:lnRef idx="2">
-            <a:schemeClr val="accent5">
-              <a:shade val="50000"/>
-            </a:schemeClr>
-          </a:lnRef>
-          <a:fillRef idx="1">
-            <a:schemeClr val="accent5"/>
-          </a:fillRef>
-          <a:effectRef idx="0">
-            <a:schemeClr val="accent5"/>
-          </a:effectRef>
-          <a:fontRef idx="minor">
-            <a:schemeClr val="lt1"/>
-          </a:fontRef>
-        </p:style>
-        <p:txBody>
-          <a:bodyPr rtlCol="0" anchor="ctr"/>
-          <a:lstStyle/>
-          <a:p>
-            <a:pPr algn="ctr"/>
-            <a:r>
-              <a:rPr kumimoji="1" lang="en-US" altLang="ja-JP" b="1" dirty="0"/>
-              <a:t>α</a:t>
-            </a:r>
-            <a:r>
-              <a:rPr kumimoji="1" lang="ja-JP" altLang="en-US" b="1" dirty="0"/>
-              <a:t>版に含まれないもの</a:t>
-            </a:r>
-            <a:endParaRPr kumimoji="1" lang="en-US" altLang="ja-JP" b="1" dirty="0"/>
-          </a:p>
-          <a:p>
-            <a:endParaRPr lang="en-US" altLang="ja-JP" dirty="0"/>
-          </a:p>
-          <a:p>
-            <a:r>
-              <a:rPr kumimoji="1" lang="ja-JP" altLang="en-US" sz="1600" dirty="0"/>
-              <a:t>・マリオ</a:t>
-            </a:r>
-            <a:endParaRPr kumimoji="1" lang="en-US" altLang="ja-JP" sz="1600" dirty="0"/>
-          </a:p>
-          <a:p>
-            <a:r>
-              <a:rPr lang="ja-JP" altLang="en-US" sz="1600" dirty="0"/>
-              <a:t>　・移動速度の調整</a:t>
-            </a:r>
-            <a:endParaRPr lang="en-US" altLang="ja-JP" sz="1600" dirty="0"/>
-          </a:p>
-          <a:p>
-            <a:r>
-              <a:rPr kumimoji="1" lang="ja-JP" altLang="en-US" sz="1600" dirty="0"/>
-              <a:t>　・ジャンプ力の調整</a:t>
-            </a:r>
-            <a:endParaRPr kumimoji="1" lang="en-US" altLang="ja-JP" sz="1600" dirty="0"/>
-          </a:p>
-          <a:p>
-            <a:r>
-              <a:rPr kumimoji="1" lang="ja-JP" altLang="en-US" sz="1600" dirty="0"/>
-              <a:t>・システム</a:t>
-            </a:r>
-            <a:endParaRPr kumimoji="1" lang="en-US" altLang="ja-JP" sz="1600" dirty="0"/>
-          </a:p>
-          <a:p>
-            <a:r>
-              <a:rPr lang="ja-JP" altLang="en-US" sz="1600" dirty="0"/>
-              <a:t>　・当たり判定の大きさ調整</a:t>
-            </a:r>
-            <a:endParaRPr lang="en-US" altLang="ja-JP" sz="1600" dirty="0"/>
-          </a:p>
-          <a:p>
-            <a:r>
-              <a:rPr kumimoji="1" lang="ja-JP" altLang="en-US" sz="1600" dirty="0"/>
-              <a:t>　・敵を倒したときに増えるスコアの調整</a:t>
-            </a:r>
-            <a:endParaRPr kumimoji="1" lang="en-US" altLang="ja-JP" sz="1600" dirty="0"/>
-          </a:p>
-          <a:p>
-            <a:r>
-              <a:rPr lang="ja-JP" altLang="en-US" sz="1600" dirty="0"/>
-              <a:t>・ステージ設計</a:t>
-            </a:r>
-            <a:endParaRPr lang="en-US" altLang="ja-JP" sz="1600" dirty="0"/>
-          </a:p>
-          <a:p>
-            <a:r>
-              <a:rPr kumimoji="1" lang="ja-JP" altLang="en-US" sz="1600" dirty="0"/>
-              <a:t>　・ブロック配置、敵配置、落とし穴配置</a:t>
-            </a:r>
-            <a:endParaRPr kumimoji="1" lang="en-US" altLang="ja-JP" sz="1600" dirty="0"/>
-          </a:p>
-          <a:p>
-            <a:r>
-              <a:rPr lang="ja-JP" altLang="en-US" sz="1600" dirty="0"/>
-              <a:t>・タイトル画面のデザイン</a:t>
-            </a:r>
-            <a:endParaRPr lang="en-US" altLang="ja-JP" sz="1600" dirty="0"/>
-          </a:p>
-          <a:p>
-            <a:endParaRPr lang="en-US" altLang="ja-JP" sz="1600" dirty="0"/>
-          </a:p>
-          <a:p>
-            <a:endParaRPr lang="en-US" altLang="ja-JP" sz="1600" dirty="0"/>
-          </a:p>
-          <a:p>
-            <a:endParaRPr lang="en-US" altLang="ja-JP" sz="1600" dirty="0"/>
-          </a:p>
-        </p:txBody>
-      </p:sp>
-    </p:spTree>
-    <p:extLst>
-      <p:ext uri="{BB962C8B-B14F-4D97-AF65-F5344CB8AC3E}">
-        <p14:creationId xmlns:p14="http://schemas.microsoft.com/office/powerpoint/2010/main" val="921013763"/>
+        <p14:creationId xmlns:p14="http://schemas.microsoft.com/office/powerpoint/2010/main" val="2125978809"/>
       </p:ext>
     </p:extLst>
   </p:cSld>

--- a/ゲーム科2年/00_前期/ゲーム開発Ⅱ/02_就職作品.pptx
+++ b/ゲーム科2年/00_前期/ゲーム開発Ⅱ/02_就職作品.pptx
@@ -264,7 +264,7 @@
           <a:p>
             <a:fld id="{E9CC885B-4903-4D54-9A93-00025F12DED9}" type="datetimeFigureOut">
               <a:rPr kumimoji="1" lang="ja-JP" altLang="en-US" smtClean="0"/>
-              <a:t>2026/3/12</a:t>
+              <a:t>2026/4/27</a:t>
             </a:fld>
             <a:endParaRPr kumimoji="1" lang="ja-JP" altLang="en-US"/>
           </a:p>
@@ -494,7 +494,7 @@
           <a:p>
             <a:fld id="{E9CC885B-4903-4D54-9A93-00025F12DED9}" type="datetimeFigureOut">
               <a:rPr kumimoji="1" lang="ja-JP" altLang="en-US" smtClean="0"/>
-              <a:t>2026/3/12</a:t>
+              <a:t>2026/4/27</a:t>
             </a:fld>
             <a:endParaRPr kumimoji="1" lang="ja-JP" altLang="en-US"/>
           </a:p>
@@ -734,7 +734,7 @@
           <a:p>
             <a:fld id="{E9CC885B-4903-4D54-9A93-00025F12DED9}" type="datetimeFigureOut">
               <a:rPr kumimoji="1" lang="ja-JP" altLang="en-US" smtClean="0"/>
-              <a:t>2026/3/12</a:t>
+              <a:t>2026/4/27</a:t>
             </a:fld>
             <a:endParaRPr kumimoji="1" lang="ja-JP" altLang="en-US"/>
           </a:p>
@@ -964,7 +964,7 @@
           <a:p>
             <a:fld id="{E9CC885B-4903-4D54-9A93-00025F12DED9}" type="datetimeFigureOut">
               <a:rPr kumimoji="1" lang="ja-JP" altLang="en-US" smtClean="0"/>
-              <a:t>2026/3/12</a:t>
+              <a:t>2026/4/27</a:t>
             </a:fld>
             <a:endParaRPr kumimoji="1" lang="ja-JP" altLang="en-US"/>
           </a:p>
@@ -1239,7 +1239,7 @@
           <a:p>
             <a:fld id="{E9CC885B-4903-4D54-9A93-00025F12DED9}" type="datetimeFigureOut">
               <a:rPr kumimoji="1" lang="ja-JP" altLang="en-US" smtClean="0"/>
-              <a:t>2026/3/12</a:t>
+              <a:t>2026/4/27</a:t>
             </a:fld>
             <a:endParaRPr kumimoji="1" lang="ja-JP" altLang="en-US"/>
           </a:p>
@@ -1568,7 +1568,7 @@
           <a:p>
             <a:fld id="{E9CC885B-4903-4D54-9A93-00025F12DED9}" type="datetimeFigureOut">
               <a:rPr kumimoji="1" lang="ja-JP" altLang="en-US" smtClean="0"/>
-              <a:t>2026/3/12</a:t>
+              <a:t>2026/4/27</a:t>
             </a:fld>
             <a:endParaRPr kumimoji="1" lang="ja-JP" altLang="en-US"/>
           </a:p>
@@ -2044,7 +2044,7 @@
           <a:p>
             <a:fld id="{E9CC885B-4903-4D54-9A93-00025F12DED9}" type="datetimeFigureOut">
               <a:rPr kumimoji="1" lang="ja-JP" altLang="en-US" smtClean="0"/>
-              <a:t>2026/3/12</a:t>
+              <a:t>2026/4/27</a:t>
             </a:fld>
             <a:endParaRPr kumimoji="1" lang="ja-JP" altLang="en-US"/>
           </a:p>
@@ -2185,7 +2185,7 @@
           <a:p>
             <a:fld id="{E9CC885B-4903-4D54-9A93-00025F12DED9}" type="datetimeFigureOut">
               <a:rPr kumimoji="1" lang="ja-JP" altLang="en-US" smtClean="0"/>
-              <a:t>2026/3/12</a:t>
+              <a:t>2026/4/27</a:t>
             </a:fld>
             <a:endParaRPr kumimoji="1" lang="ja-JP" altLang="en-US"/>
           </a:p>
@@ -2298,7 +2298,7 @@
           <a:p>
             <a:fld id="{E9CC885B-4903-4D54-9A93-00025F12DED9}" type="datetimeFigureOut">
               <a:rPr kumimoji="1" lang="ja-JP" altLang="en-US" smtClean="0"/>
-              <a:t>2026/3/12</a:t>
+              <a:t>2026/4/27</a:t>
             </a:fld>
             <a:endParaRPr kumimoji="1" lang="ja-JP" altLang="en-US"/>
           </a:p>
@@ -2641,7 +2641,7 @@
           <a:p>
             <a:fld id="{E9CC885B-4903-4D54-9A93-00025F12DED9}" type="datetimeFigureOut">
               <a:rPr kumimoji="1" lang="ja-JP" altLang="en-US" smtClean="0"/>
-              <a:t>2026/3/12</a:t>
+              <a:t>2026/4/27</a:t>
             </a:fld>
             <a:endParaRPr kumimoji="1" lang="ja-JP" altLang="en-US"/>
           </a:p>
@@ -2929,7 +2929,7 @@
           <a:p>
             <a:fld id="{E9CC885B-4903-4D54-9A93-00025F12DED9}" type="datetimeFigureOut">
               <a:rPr kumimoji="1" lang="ja-JP" altLang="en-US" smtClean="0"/>
-              <a:t>2026/3/12</a:t>
+              <a:t>2026/4/27</a:t>
             </a:fld>
             <a:endParaRPr kumimoji="1" lang="ja-JP" altLang="en-US"/>
           </a:p>
@@ -3202,7 +3202,7 @@
           <a:p>
             <a:fld id="{E9CC885B-4903-4D54-9A93-00025F12DED9}" type="datetimeFigureOut">
               <a:rPr kumimoji="1" lang="ja-JP" altLang="en-US" smtClean="0"/>
-              <a:t>2026/3/12</a:t>
+              <a:t>2026/4/27</a:t>
             </a:fld>
             <a:endParaRPr kumimoji="1" lang="ja-JP" altLang="en-US"/>
           </a:p>
@@ -3771,7 +3771,7 @@
         <p:spPr>
           <a:xfrm>
             <a:off x="567542" y="491954"/>
-            <a:ext cx="1826141" cy="584775"/>
+            <a:ext cx="3584636" cy="584775"/>
           </a:xfrm>
           <a:prstGeom prst="rect">
             <a:avLst/>
@@ -3786,7 +3786,7 @@
           <a:p>
             <a:r>
               <a:rPr kumimoji="1" lang="ja-JP" altLang="en-US" sz="3200" b="1" u="sng" dirty="0"/>
-              <a:t>就職作品</a:t>
+              <a:t>就職作品 基本情報</a:t>
             </a:r>
             <a:endParaRPr kumimoji="1" lang="en-US" altLang="ja-JP" sz="3200" b="1" u="sng" dirty="0"/>
           </a:p>
@@ -3807,7 +3807,7 @@
         <p:spPr>
           <a:xfrm>
             <a:off x="567542" y="1216429"/>
-            <a:ext cx="6647974" cy="2677656"/>
+            <a:ext cx="10512814" cy="4154984"/>
           </a:xfrm>
           <a:prstGeom prst="rect">
             <a:avLst/>
@@ -3822,16 +3822,6 @@
           <a:p>
             <a:r>
               <a:rPr lang="ja-JP" altLang="en-US" sz="2400" dirty="0"/>
-              <a:t>基本情報を以下にまとめます。</a:t>
-            </a:r>
-            <a:endParaRPr lang="en-US" altLang="ja-JP" sz="2400" dirty="0"/>
-          </a:p>
-          <a:p>
-            <a:endParaRPr lang="en-US" altLang="ja-JP" sz="2400" dirty="0"/>
-          </a:p>
-          <a:p>
-            <a:r>
-              <a:rPr lang="ja-JP" altLang="en-US" sz="2400" dirty="0"/>
               <a:t>開発環境：</a:t>
             </a:r>
             <a:r>
@@ -3862,17 +3852,119 @@
           <a:p>
             <a:r>
               <a:rPr lang="ja-JP" altLang="en-US" sz="2400" dirty="0"/>
-              <a:t>締め切り：１月実施予定の作品展示会３日前</a:t>
+              <a:t>開発期間：～</a:t>
+            </a:r>
+            <a:r>
+              <a:rPr lang="en-US" altLang="ja-JP" sz="2400" dirty="0"/>
+              <a:t>1/19</a:t>
+            </a:r>
+            <a:r>
+              <a:rPr lang="ja-JP" altLang="en-US" sz="2400" dirty="0"/>
+              <a:t>（火）</a:t>
             </a:r>
             <a:endParaRPr lang="en-US" altLang="ja-JP" sz="2400" dirty="0"/>
           </a:p>
           <a:p>
+            <a:r>
+              <a:rPr lang="en-US" altLang="ja-JP" sz="2400" dirty="0"/>
+              <a:t>※</a:t>
+            </a:r>
+            <a:r>
+              <a:rPr lang="ja-JP" altLang="en-US" sz="2400" dirty="0"/>
+              <a:t>授業として時間を確保する期間です</a:t>
+            </a:r>
             <a:endParaRPr lang="en-US" altLang="ja-JP" sz="2400" dirty="0"/>
           </a:p>
           <a:p>
+            <a:endParaRPr lang="en-US" altLang="ja-JP" sz="2400" dirty="0"/>
+          </a:p>
+          <a:p>
+            <a:r>
+              <a:rPr lang="ja-JP" altLang="en-US" sz="2400" b="1" dirty="0">
+                <a:solidFill>
+                  <a:srgbClr val="FF0000"/>
+                </a:solidFill>
+              </a:rPr>
+              <a:t>■目標</a:t>
+            </a:r>
+            <a:endParaRPr lang="en-US" altLang="ja-JP" sz="2400" b="1" dirty="0">
+              <a:solidFill>
+                <a:srgbClr val="FF0000"/>
+              </a:solidFill>
+            </a:endParaRPr>
+          </a:p>
+          <a:p>
             <a:r>
               <a:rPr lang="ja-JP" altLang="en-US" sz="2400" dirty="0"/>
-              <a:t>変更したい場合は担任に必ず相談しましょう。</a:t>
+              <a:t>・</a:t>
+            </a:r>
+            <a:r>
+              <a:rPr lang="en-US" altLang="ja-JP" sz="2400" dirty="0"/>
+              <a:t>11</a:t>
+            </a:r>
+            <a:r>
+              <a:rPr lang="ja-JP" altLang="en-US" sz="2400" dirty="0"/>
+              <a:t>月から始まる企業の早期採用に応募する</a:t>
+            </a:r>
+            <a:endParaRPr lang="en-US" altLang="ja-JP" sz="2400" dirty="0"/>
+          </a:p>
+          <a:p>
+            <a:r>
+              <a:rPr lang="ja-JP" altLang="en-US" sz="2400" b="1" dirty="0">
+                <a:solidFill>
+                  <a:srgbClr val="FF0000"/>
+                </a:solidFill>
+              </a:rPr>
+              <a:t>・</a:t>
+            </a:r>
+            <a:r>
+              <a:rPr lang="en-US" altLang="ja-JP" sz="2400" b="1" dirty="0">
+                <a:solidFill>
+                  <a:srgbClr val="FF0000"/>
+                </a:solidFill>
+              </a:rPr>
+              <a:t>1</a:t>
+            </a:r>
+            <a:r>
+              <a:rPr lang="ja-JP" altLang="en-US" sz="2400" b="1" dirty="0">
+                <a:solidFill>
+                  <a:srgbClr val="FF0000"/>
+                </a:solidFill>
+              </a:rPr>
+              <a:t>月にある作品展示会に展示して、企業からスカウトされる</a:t>
+            </a:r>
+            <a:endParaRPr lang="en-US" altLang="ja-JP" sz="2400" b="1" dirty="0">
+              <a:solidFill>
+                <a:srgbClr val="FF0000"/>
+              </a:solidFill>
+            </a:endParaRPr>
+          </a:p>
+          <a:p>
+            <a:r>
+              <a:rPr lang="ja-JP" altLang="en-US" sz="2400" dirty="0"/>
+              <a:t>・</a:t>
+            </a:r>
+            <a:r>
+              <a:rPr lang="en-US" altLang="ja-JP" sz="2400" dirty="0"/>
+              <a:t>4</a:t>
+            </a:r>
+            <a:r>
+              <a:rPr lang="ja-JP" altLang="en-US" sz="2400" dirty="0"/>
+              <a:t>月から一斉に始まる書類選考へ応募する</a:t>
+            </a:r>
+            <a:endParaRPr lang="en-US" altLang="ja-JP" sz="2400" dirty="0"/>
+          </a:p>
+          <a:p>
+            <a:endParaRPr lang="en-US" altLang="ja-JP" sz="2400" dirty="0"/>
+          </a:p>
+          <a:p>
+            <a:r>
+              <a:rPr lang="en-US" altLang="ja-JP" sz="2400" dirty="0"/>
+              <a:t>1</a:t>
+            </a:r>
+            <a:r>
+              <a:rPr lang="ja-JP" altLang="en-US" sz="2400" dirty="0"/>
+              <a:t>月の展示会に出せない場合は業界就職自体を諦める可能性が出てきます。</a:t>
             </a:r>
             <a:endParaRPr lang="en-US" altLang="ja-JP" sz="2400" dirty="0"/>
           </a:p>
@@ -4162,7 +4254,7 @@
         <p:spPr>
           <a:xfrm>
             <a:off x="567542" y="1216429"/>
-            <a:ext cx="7879080" cy="4893647"/>
+            <a:ext cx="8802410" cy="4893647"/>
           </a:xfrm>
           <a:prstGeom prst="rect">
             <a:avLst/>
@@ -4254,8 +4346,16 @@
           </a:p>
           <a:p>
             <a:r>
+              <a:rPr lang="ja-JP" altLang="en-US" sz="2400" b="1" dirty="0">
+                <a:solidFill>
+                  <a:srgbClr val="FF0000"/>
+                </a:solidFill>
+              </a:rPr>
+              <a:t>難しいと思うものを無理に使う必要はありません</a:t>
+            </a:r>
+            <a:r>
               <a:rPr lang="ja-JP" altLang="en-US" sz="2400" dirty="0"/>
-              <a:t>難しいと思うものを無理に使う必要はありませんが、</a:t>
+              <a:t>が、</a:t>
             </a:r>
             <a:endParaRPr lang="en-US" altLang="ja-JP" sz="2400" dirty="0"/>
           </a:p>
@@ -4269,7 +4369,7 @@
           <a:p>
             <a:r>
               <a:rPr lang="ja-JP" altLang="en-US" sz="2400" dirty="0"/>
-              <a:t>ポートフォリオにも載せることができます。</a:t>
+              <a:t>ポートフォリオのアピール点として載せることができます。</a:t>
             </a:r>
             <a:endParaRPr lang="en-US" altLang="ja-JP" sz="2400" dirty="0"/>
           </a:p>
@@ -4356,7 +4456,7 @@
         <p:spPr>
           <a:xfrm>
             <a:off x="567542" y="1216429"/>
-            <a:ext cx="9110186" cy="1938992"/>
+            <a:ext cx="9110186" cy="3046988"/>
           </a:xfrm>
           <a:prstGeom prst="rect">
             <a:avLst/>
@@ -4396,6 +4496,31 @@
             <a:r>
               <a:rPr lang="ja-JP" altLang="en-US" sz="2400" dirty="0"/>
               <a:t>可能な限り放課後も残って作業しましょう。</a:t>
+            </a:r>
+            <a:endParaRPr lang="en-US" altLang="ja-JP" sz="2400" dirty="0"/>
+          </a:p>
+          <a:p>
+            <a:endParaRPr lang="en-US" altLang="ja-JP" sz="2400" dirty="0"/>
+          </a:p>
+          <a:p>
+            <a:r>
+              <a:rPr lang="ja-JP" altLang="en-US" sz="2400" dirty="0"/>
+              <a:t>また、当面はゲームエンジンの授業もあるので、</a:t>
+            </a:r>
+            <a:endParaRPr lang="en-US" altLang="ja-JP" sz="2400" dirty="0"/>
+          </a:p>
+          <a:p>
+            <a:r>
+              <a:rPr lang="ja-JP" altLang="en-US" sz="2400" dirty="0"/>
+              <a:t>就職作品を作る授業は</a:t>
+            </a:r>
+            <a:r>
+              <a:rPr lang="en-US" altLang="ja-JP" sz="2400" dirty="0"/>
+              <a:t>2</a:t>
+            </a:r>
+            <a:r>
+              <a:rPr lang="ja-JP" altLang="en-US" sz="2400" dirty="0"/>
+              <a:t>限目までになります。</a:t>
             </a:r>
             <a:endParaRPr lang="en-US" altLang="ja-JP" sz="2400" dirty="0"/>
           </a:p>

--- a/ゲーム科2年/00_前期/ゲーム開発Ⅱ/02_就職作品.pptx
+++ b/ゲーム科2年/00_前期/ゲーム開発Ⅱ/02_就職作品.pptx
@@ -8,9 +8,10 @@
     <p:sldId id="257" r:id="rId2"/>
     <p:sldId id="261" r:id="rId3"/>
     <p:sldId id="262" r:id="rId4"/>
-    <p:sldId id="259" r:id="rId5"/>
-    <p:sldId id="260" r:id="rId6"/>
-    <p:sldId id="263" r:id="rId7"/>
+    <p:sldId id="264" r:id="rId5"/>
+    <p:sldId id="259" r:id="rId6"/>
+    <p:sldId id="260" r:id="rId7"/>
+    <p:sldId id="263" r:id="rId8"/>
   </p:sldIdLst>
   <p:sldSz cx="12192000" cy="6858000"/>
   <p:notesSz cx="6858000" cy="9144000"/>
@@ -264,7 +265,7 @@
           <a:p>
             <a:fld id="{E9CC885B-4903-4D54-9A93-00025F12DED9}" type="datetimeFigureOut">
               <a:rPr kumimoji="1" lang="ja-JP" altLang="en-US" smtClean="0"/>
-              <a:t>2026/4/27</a:t>
+              <a:t>2026/5/18</a:t>
             </a:fld>
             <a:endParaRPr kumimoji="1" lang="ja-JP" altLang="en-US"/>
           </a:p>
@@ -494,7 +495,7 @@
           <a:p>
             <a:fld id="{E9CC885B-4903-4D54-9A93-00025F12DED9}" type="datetimeFigureOut">
               <a:rPr kumimoji="1" lang="ja-JP" altLang="en-US" smtClean="0"/>
-              <a:t>2026/4/27</a:t>
+              <a:t>2026/5/18</a:t>
             </a:fld>
             <a:endParaRPr kumimoji="1" lang="ja-JP" altLang="en-US"/>
           </a:p>
@@ -734,7 +735,7 @@
           <a:p>
             <a:fld id="{E9CC885B-4903-4D54-9A93-00025F12DED9}" type="datetimeFigureOut">
               <a:rPr kumimoji="1" lang="ja-JP" altLang="en-US" smtClean="0"/>
-              <a:t>2026/4/27</a:t>
+              <a:t>2026/5/18</a:t>
             </a:fld>
             <a:endParaRPr kumimoji="1" lang="ja-JP" altLang="en-US"/>
           </a:p>
@@ -964,7 +965,7 @@
           <a:p>
             <a:fld id="{E9CC885B-4903-4D54-9A93-00025F12DED9}" type="datetimeFigureOut">
               <a:rPr kumimoji="1" lang="ja-JP" altLang="en-US" smtClean="0"/>
-              <a:t>2026/4/27</a:t>
+              <a:t>2026/5/18</a:t>
             </a:fld>
             <a:endParaRPr kumimoji="1" lang="ja-JP" altLang="en-US"/>
           </a:p>
@@ -1239,7 +1240,7 @@
           <a:p>
             <a:fld id="{E9CC885B-4903-4D54-9A93-00025F12DED9}" type="datetimeFigureOut">
               <a:rPr kumimoji="1" lang="ja-JP" altLang="en-US" smtClean="0"/>
-              <a:t>2026/4/27</a:t>
+              <a:t>2026/5/18</a:t>
             </a:fld>
             <a:endParaRPr kumimoji="1" lang="ja-JP" altLang="en-US"/>
           </a:p>
@@ -1568,7 +1569,7 @@
           <a:p>
             <a:fld id="{E9CC885B-4903-4D54-9A93-00025F12DED9}" type="datetimeFigureOut">
               <a:rPr kumimoji="1" lang="ja-JP" altLang="en-US" smtClean="0"/>
-              <a:t>2026/4/27</a:t>
+              <a:t>2026/5/18</a:t>
             </a:fld>
             <a:endParaRPr kumimoji="1" lang="ja-JP" altLang="en-US"/>
           </a:p>
@@ -2044,7 +2045,7 @@
           <a:p>
             <a:fld id="{E9CC885B-4903-4D54-9A93-00025F12DED9}" type="datetimeFigureOut">
               <a:rPr kumimoji="1" lang="ja-JP" altLang="en-US" smtClean="0"/>
-              <a:t>2026/4/27</a:t>
+              <a:t>2026/5/18</a:t>
             </a:fld>
             <a:endParaRPr kumimoji="1" lang="ja-JP" altLang="en-US"/>
           </a:p>
@@ -2185,7 +2186,7 @@
           <a:p>
             <a:fld id="{E9CC885B-4903-4D54-9A93-00025F12DED9}" type="datetimeFigureOut">
               <a:rPr kumimoji="1" lang="ja-JP" altLang="en-US" smtClean="0"/>
-              <a:t>2026/4/27</a:t>
+              <a:t>2026/5/18</a:t>
             </a:fld>
             <a:endParaRPr kumimoji="1" lang="ja-JP" altLang="en-US"/>
           </a:p>
@@ -2298,7 +2299,7 @@
           <a:p>
             <a:fld id="{E9CC885B-4903-4D54-9A93-00025F12DED9}" type="datetimeFigureOut">
               <a:rPr kumimoji="1" lang="ja-JP" altLang="en-US" smtClean="0"/>
-              <a:t>2026/4/27</a:t>
+              <a:t>2026/5/18</a:t>
             </a:fld>
             <a:endParaRPr kumimoji="1" lang="ja-JP" altLang="en-US"/>
           </a:p>
@@ -2641,7 +2642,7 @@
           <a:p>
             <a:fld id="{E9CC885B-4903-4D54-9A93-00025F12DED9}" type="datetimeFigureOut">
               <a:rPr kumimoji="1" lang="ja-JP" altLang="en-US" smtClean="0"/>
-              <a:t>2026/4/27</a:t>
+              <a:t>2026/5/18</a:t>
             </a:fld>
             <a:endParaRPr kumimoji="1" lang="ja-JP" altLang="en-US"/>
           </a:p>
@@ -2929,7 +2930,7 @@
           <a:p>
             <a:fld id="{E9CC885B-4903-4D54-9A93-00025F12DED9}" type="datetimeFigureOut">
               <a:rPr kumimoji="1" lang="ja-JP" altLang="en-US" smtClean="0"/>
-              <a:t>2026/4/27</a:t>
+              <a:t>2026/5/18</a:t>
             </a:fld>
             <a:endParaRPr kumimoji="1" lang="ja-JP" altLang="en-US"/>
           </a:p>
@@ -3202,7 +3203,7 @@
           <a:p>
             <a:fld id="{E9CC885B-4903-4D54-9A93-00025F12DED9}" type="datetimeFigureOut">
               <a:rPr kumimoji="1" lang="ja-JP" altLang="en-US" smtClean="0"/>
-              <a:t>2026/4/27</a:t>
+              <a:t>2026/5/18</a:t>
             </a:fld>
             <a:endParaRPr kumimoji="1" lang="ja-JP" altLang="en-US"/>
           </a:p>
@@ -4051,7 +4052,7 @@
         <p:spPr>
           <a:xfrm>
             <a:off x="567542" y="1216429"/>
-            <a:ext cx="7879080" cy="4524315"/>
+            <a:ext cx="7263527" cy="4524315"/>
           </a:xfrm>
           <a:prstGeom prst="rect">
             <a:avLst/>
@@ -4142,15 +4143,7 @@
             </a:r>
             <a:r>
               <a:rPr lang="ja-JP" altLang="en-US" sz="2400" dirty="0"/>
-              <a:t>ゲーム開発</a:t>
-            </a:r>
-            <a:r>
-              <a:rPr lang="en-US" altLang="ja-JP" sz="2400" dirty="0"/>
-              <a:t>Ⅲ</a:t>
-            </a:r>
-            <a:r>
-              <a:rPr lang="ja-JP" altLang="en-US" sz="2400" dirty="0"/>
-              <a:t>の成績にはゲーム物理学も含まれます。</a:t>
+              <a:t>就職作品以外も成績に影響が出る要素はあります</a:t>
             </a:r>
             <a:endParaRPr lang="en-US" altLang="ja-JP" sz="2400" dirty="0"/>
           </a:p>
@@ -4218,7 +4211,7 @@
         <p:spPr>
           <a:xfrm>
             <a:off x="567542" y="491954"/>
-            <a:ext cx="2763898" cy="584775"/>
+            <a:ext cx="4405373" cy="584775"/>
           </a:xfrm>
           <a:prstGeom prst="rect">
             <a:avLst/>
@@ -4233,7 +4226,7 @@
           <a:p>
             <a:r>
               <a:rPr kumimoji="1" lang="ja-JP" altLang="en-US" sz="3200" b="1" u="sng" dirty="0"/>
-              <a:t>就職作品 制作</a:t>
+              <a:t>就職作品 スケジュール</a:t>
             </a:r>
             <a:endParaRPr kumimoji="1" lang="en-US" altLang="ja-JP" sz="3200" b="1" u="sng" dirty="0"/>
           </a:p>
@@ -4254,7 +4247,7 @@
         <p:spPr>
           <a:xfrm>
             <a:off x="567542" y="1216429"/>
-            <a:ext cx="8802410" cy="4893647"/>
+            <a:ext cx="10033516" cy="4893647"/>
           </a:xfrm>
           <a:prstGeom prst="rect">
             <a:avLst/>
@@ -4269,107 +4262,141 @@
           <a:p>
             <a:r>
               <a:rPr lang="ja-JP" altLang="en-US" sz="2400" dirty="0"/>
-              <a:t>最新の</a:t>
+              <a:t>スケジュールは以下の通りです</a:t>
+            </a:r>
+            <a:endParaRPr lang="en-US" altLang="ja-JP" sz="2400" dirty="0"/>
+          </a:p>
+          <a:p>
+            <a:endParaRPr lang="en-US" altLang="ja-JP" sz="2400" dirty="0"/>
+          </a:p>
+          <a:p>
+            <a:r>
+              <a:rPr lang="ja-JP" altLang="en-US" sz="2400" dirty="0"/>
+              <a:t>・</a:t>
             </a:r>
             <a:r>
               <a:rPr lang="en-US" altLang="ja-JP" sz="2400" dirty="0"/>
-              <a:t>C++</a:t>
-            </a:r>
-            <a:r>
-              <a:rPr lang="ja-JP" altLang="en-US" sz="2400" dirty="0"/>
-              <a:t>授業資料をお配りします。</a:t>
+              <a:t>6/30	</a:t>
+            </a:r>
+            <a:r>
+              <a:rPr lang="ja-JP" altLang="en-US" sz="2400" dirty="0"/>
+              <a:t>進捗確認</a:t>
+            </a:r>
+            <a:r>
+              <a:rPr lang="en-US" altLang="ja-JP" sz="2400" dirty="0"/>
+              <a:t>A</a:t>
+            </a:r>
+          </a:p>
+          <a:p>
+            <a:r>
+              <a:rPr lang="ja-JP" altLang="en-US" sz="2400" dirty="0"/>
+              <a:t>・</a:t>
+            </a:r>
+            <a:r>
+              <a:rPr lang="en-US" altLang="ja-JP" sz="2400" dirty="0"/>
+              <a:t>7/22	α</a:t>
+            </a:r>
+            <a:r>
+              <a:rPr lang="ja-JP" altLang="en-US" sz="2400" dirty="0"/>
+              <a:t>版</a:t>
             </a:r>
             <a:endParaRPr lang="en-US" altLang="ja-JP" sz="2400" dirty="0"/>
           </a:p>
           <a:p>
             <a:r>
               <a:rPr lang="ja-JP" altLang="en-US" sz="2400" dirty="0"/>
-              <a:t>これらのテクニックを十分に使って制作してください。</a:t>
+              <a:t>・</a:t>
+            </a:r>
+            <a:r>
+              <a:rPr lang="en-US" altLang="ja-JP" sz="2400" dirty="0"/>
+              <a:t>10/1	</a:t>
+            </a:r>
+            <a:r>
+              <a:rPr lang="ja-JP" altLang="en-US" sz="2400" dirty="0"/>
+              <a:t>進捗確認</a:t>
+            </a:r>
+            <a:r>
+              <a:rPr lang="en-US" altLang="ja-JP" sz="2400" dirty="0"/>
+              <a:t>B</a:t>
+            </a:r>
+          </a:p>
+          <a:p>
+            <a:r>
+              <a:rPr lang="ja-JP" altLang="en-US" sz="2400" dirty="0"/>
+              <a:t>・</a:t>
+            </a:r>
+            <a:r>
+              <a:rPr lang="en-US" altLang="ja-JP" sz="2400" dirty="0"/>
+              <a:t>11/5	β</a:t>
+            </a:r>
+            <a:r>
+              <a:rPr lang="ja-JP" altLang="en-US" sz="2400" dirty="0"/>
+              <a:t>版</a:t>
             </a:r>
             <a:endParaRPr lang="en-US" altLang="ja-JP" sz="2400" dirty="0"/>
           </a:p>
           <a:p>
+            <a:r>
+              <a:rPr lang="ja-JP" altLang="en-US" sz="2400" dirty="0"/>
+              <a:t>・</a:t>
+            </a:r>
+            <a:r>
+              <a:rPr lang="en-US" altLang="ja-JP" sz="2400" dirty="0"/>
+              <a:t>1/19	</a:t>
+            </a:r>
+            <a:r>
+              <a:rPr lang="ja-JP" altLang="en-US" sz="2400" dirty="0"/>
+              <a:t>マスターアップ</a:t>
+            </a:r>
             <a:endParaRPr lang="en-US" altLang="ja-JP" sz="2400" dirty="0"/>
           </a:p>
           <a:p>
-            <a:r>
-              <a:rPr lang="ja-JP" altLang="en-US" sz="2400" b="1" dirty="0">
-                <a:solidFill>
-                  <a:srgbClr val="FF0000"/>
-                </a:solidFill>
-              </a:rPr>
-              <a:t>■使ってほしい技術</a:t>
-            </a:r>
-            <a:endParaRPr lang="en-US" altLang="ja-JP" sz="2400" b="1" dirty="0">
-              <a:solidFill>
-                <a:srgbClr val="FF0000"/>
-              </a:solidFill>
-            </a:endParaRPr>
-          </a:p>
-          <a:p>
-            <a:r>
-              <a:rPr lang="ja-JP" altLang="en-US" sz="2400" dirty="0"/>
-              <a:t>・スマートポインタ</a:t>
-            </a:r>
             <a:endParaRPr lang="en-US" altLang="ja-JP" sz="2400" dirty="0"/>
           </a:p>
           <a:p>
             <a:r>
               <a:rPr lang="ja-JP" altLang="en-US" sz="2400" dirty="0"/>
-              <a:t>・マルチスレッド</a:t>
+              <a:t>まずは</a:t>
+            </a:r>
+            <a:r>
+              <a:rPr lang="en-US" altLang="ja-JP" sz="2400" dirty="0"/>
+              <a:t>α</a:t>
+            </a:r>
+            <a:r>
+              <a:rPr lang="ja-JP" altLang="en-US" sz="2400" dirty="0"/>
+              <a:t>版でゲームの核となる要素を実装します。</a:t>
             </a:r>
             <a:endParaRPr lang="en-US" altLang="ja-JP" sz="2400" dirty="0"/>
           </a:p>
           <a:p>
             <a:r>
               <a:rPr lang="ja-JP" altLang="en-US" sz="2400" dirty="0"/>
-              <a:t>・ファイル操作</a:t>
+              <a:t>スケジュールを作る際も、まずは</a:t>
+            </a:r>
+            <a:r>
+              <a:rPr lang="en-US" altLang="ja-JP" sz="2400" dirty="0"/>
+              <a:t>α</a:t>
+            </a:r>
+            <a:r>
+              <a:rPr lang="ja-JP" altLang="en-US" sz="2400" dirty="0"/>
+              <a:t>版までのスケジュールで良いです。</a:t>
             </a:r>
             <a:endParaRPr lang="en-US" altLang="ja-JP" sz="2400" dirty="0"/>
           </a:p>
           <a:p>
-            <a:r>
-              <a:rPr lang="ja-JP" altLang="en-US" sz="2400" dirty="0"/>
-              <a:t>・動的配列クラス</a:t>
-            </a:r>
             <a:endParaRPr lang="en-US" altLang="ja-JP" sz="2400" dirty="0"/>
           </a:p>
           <a:p>
             <a:r>
               <a:rPr lang="ja-JP" altLang="en-US" sz="2400" dirty="0"/>
-              <a:t>・リストクラス</a:t>
+              <a:t>とはいえ、制作するゲームによって実装内容は様々なので、</a:t>
             </a:r>
             <a:endParaRPr lang="en-US" altLang="ja-JP" sz="2400" dirty="0"/>
           </a:p>
           <a:p>
-            <a:endParaRPr lang="en-US" altLang="ja-JP" sz="2400" dirty="0"/>
-          </a:p>
-          <a:p>
-            <a:r>
-              <a:rPr lang="ja-JP" altLang="en-US" sz="2400" b="1" dirty="0">
-                <a:solidFill>
-                  <a:srgbClr val="FF0000"/>
-                </a:solidFill>
-              </a:rPr>
-              <a:t>難しいと思うものを無理に使う必要はありません</a:t>
-            </a:r>
-            <a:r>
-              <a:rPr lang="ja-JP" altLang="en-US" sz="2400" dirty="0"/>
-              <a:t>が、</a:t>
-            </a:r>
-            <a:endParaRPr lang="en-US" altLang="ja-JP" sz="2400" dirty="0"/>
-          </a:p>
-          <a:p>
-            <a:r>
-              <a:rPr lang="ja-JP" altLang="en-US" sz="2400" dirty="0"/>
-              <a:t>これらが使われている作品は高く評価されますし、</a:t>
-            </a:r>
-            <a:endParaRPr lang="en-US" altLang="ja-JP" sz="2400" dirty="0"/>
-          </a:p>
-          <a:p>
-            <a:r>
-              <a:rPr lang="ja-JP" altLang="en-US" sz="2400" dirty="0"/>
-              <a:t>ポートフォリオのアピール点として載せることができます。</a:t>
+            <a:r>
+              <a:rPr lang="ja-JP" altLang="en-US" sz="2400" dirty="0"/>
+              <a:t>先生と相談しながら実装内容を考えていきましょう。</a:t>
             </a:r>
             <a:endParaRPr lang="en-US" altLang="ja-JP" sz="2400" dirty="0"/>
           </a:p>
@@ -4378,7 +4405,7 @@
     </p:spTree>
     <p:extLst>
       <p:ext uri="{BB962C8B-B14F-4D97-AF65-F5344CB8AC3E}">
-        <p14:creationId xmlns:p14="http://schemas.microsoft.com/office/powerpoint/2010/main" val="248732990"/>
+        <p14:creationId xmlns:p14="http://schemas.microsoft.com/office/powerpoint/2010/main" val="1055553938"/>
       </p:ext>
     </p:extLst>
   </p:cSld>
@@ -4456,6 +4483,208 @@
         <p:spPr>
           <a:xfrm>
             <a:off x="567542" y="1216429"/>
+            <a:ext cx="8802410" cy="4893647"/>
+          </a:xfrm>
+          <a:prstGeom prst="rect">
+            <a:avLst/>
+          </a:prstGeom>
+          <a:noFill/>
+        </p:spPr>
+        <p:txBody>
+          <a:bodyPr wrap="none" rtlCol="0">
+            <a:spAutoFit/>
+          </a:bodyPr>
+          <a:lstStyle/>
+          <a:p>
+            <a:r>
+              <a:rPr lang="ja-JP" altLang="en-US" sz="2400" dirty="0"/>
+              <a:t>最新の</a:t>
+            </a:r>
+            <a:r>
+              <a:rPr lang="en-US" altLang="ja-JP" sz="2400" dirty="0"/>
+              <a:t>C++</a:t>
+            </a:r>
+            <a:r>
+              <a:rPr lang="ja-JP" altLang="en-US" sz="2400" dirty="0"/>
+              <a:t>授業資料をお配りします。</a:t>
+            </a:r>
+            <a:endParaRPr lang="en-US" altLang="ja-JP" sz="2400" dirty="0"/>
+          </a:p>
+          <a:p>
+            <a:r>
+              <a:rPr lang="ja-JP" altLang="en-US" sz="2400" dirty="0"/>
+              <a:t>これらのテクニックを十分に使って制作してください。</a:t>
+            </a:r>
+            <a:endParaRPr lang="en-US" altLang="ja-JP" sz="2400" dirty="0"/>
+          </a:p>
+          <a:p>
+            <a:endParaRPr lang="en-US" altLang="ja-JP" sz="2400" dirty="0"/>
+          </a:p>
+          <a:p>
+            <a:r>
+              <a:rPr lang="ja-JP" altLang="en-US" sz="2400" b="1" dirty="0">
+                <a:solidFill>
+                  <a:srgbClr val="FF0000"/>
+                </a:solidFill>
+              </a:rPr>
+              <a:t>■使ってほしい技術</a:t>
+            </a:r>
+            <a:endParaRPr lang="en-US" altLang="ja-JP" sz="2400" b="1" dirty="0">
+              <a:solidFill>
+                <a:srgbClr val="FF0000"/>
+              </a:solidFill>
+            </a:endParaRPr>
+          </a:p>
+          <a:p>
+            <a:r>
+              <a:rPr lang="ja-JP" altLang="en-US" sz="2400" dirty="0"/>
+              <a:t>・スマートポインタ</a:t>
+            </a:r>
+            <a:endParaRPr lang="en-US" altLang="ja-JP" sz="2400" dirty="0"/>
+          </a:p>
+          <a:p>
+            <a:r>
+              <a:rPr lang="ja-JP" altLang="en-US" sz="2400" dirty="0"/>
+              <a:t>・マルチスレッド</a:t>
+            </a:r>
+            <a:endParaRPr lang="en-US" altLang="ja-JP" sz="2400" dirty="0"/>
+          </a:p>
+          <a:p>
+            <a:r>
+              <a:rPr lang="ja-JP" altLang="en-US" sz="2400" dirty="0"/>
+              <a:t>・ファイル操作</a:t>
+            </a:r>
+            <a:endParaRPr lang="en-US" altLang="ja-JP" sz="2400" dirty="0"/>
+          </a:p>
+          <a:p>
+            <a:r>
+              <a:rPr lang="ja-JP" altLang="en-US" sz="2400" dirty="0"/>
+              <a:t>・動的配列クラス</a:t>
+            </a:r>
+            <a:endParaRPr lang="en-US" altLang="ja-JP" sz="2400" dirty="0"/>
+          </a:p>
+          <a:p>
+            <a:r>
+              <a:rPr lang="ja-JP" altLang="en-US" sz="2400" dirty="0"/>
+              <a:t>・リストクラス</a:t>
+            </a:r>
+            <a:endParaRPr lang="en-US" altLang="ja-JP" sz="2400" dirty="0"/>
+          </a:p>
+          <a:p>
+            <a:endParaRPr lang="en-US" altLang="ja-JP" sz="2400" dirty="0"/>
+          </a:p>
+          <a:p>
+            <a:r>
+              <a:rPr lang="ja-JP" altLang="en-US" sz="2400" b="1" dirty="0">
+                <a:solidFill>
+                  <a:srgbClr val="FF0000"/>
+                </a:solidFill>
+              </a:rPr>
+              <a:t>難しいと思うものを無理に使う必要はありません</a:t>
+            </a:r>
+            <a:r>
+              <a:rPr lang="ja-JP" altLang="en-US" sz="2400" dirty="0"/>
+              <a:t>が、</a:t>
+            </a:r>
+            <a:endParaRPr lang="en-US" altLang="ja-JP" sz="2400" dirty="0"/>
+          </a:p>
+          <a:p>
+            <a:r>
+              <a:rPr lang="ja-JP" altLang="en-US" sz="2400" dirty="0"/>
+              <a:t>これらが使われている作品は高く評価されますし、</a:t>
+            </a:r>
+            <a:endParaRPr lang="en-US" altLang="ja-JP" sz="2400" dirty="0"/>
+          </a:p>
+          <a:p>
+            <a:r>
+              <a:rPr lang="ja-JP" altLang="en-US" sz="2400" dirty="0"/>
+              <a:t>ポートフォリオのアピール点として載せることができます。</a:t>
+            </a:r>
+            <a:endParaRPr lang="en-US" altLang="ja-JP" sz="2400" dirty="0"/>
+          </a:p>
+        </p:txBody>
+      </p:sp>
+    </p:spTree>
+    <p:extLst>
+      <p:ext uri="{BB962C8B-B14F-4D97-AF65-F5344CB8AC3E}">
+        <p14:creationId xmlns:p14="http://schemas.microsoft.com/office/powerpoint/2010/main" val="248732990"/>
+      </p:ext>
+    </p:extLst>
+  </p:cSld>
+  <p:clrMapOvr>
+    <a:masterClrMapping/>
+  </p:clrMapOvr>
+</p:sld>
+</file>
+
+<file path=ppt/slides/slide6.xml><?xml version="1.0" encoding="utf-8"?>
+<p:sld xmlns:a="http://schemas.openxmlformats.org/drawingml/2006/main" xmlns:r="http://schemas.openxmlformats.org/officeDocument/2006/relationships" xmlns:p="http://schemas.openxmlformats.org/presentationml/2006/main">
+  <p:cSld>
+    <p:spTree>
+      <p:nvGrpSpPr>
+        <p:cNvPr id="1" name=""/>
+        <p:cNvGrpSpPr/>
+        <p:nvPr/>
+      </p:nvGrpSpPr>
+      <p:grpSpPr>
+        <a:xfrm>
+          <a:off x="0" y="0"/>
+          <a:ext cx="0" cy="0"/>
+          <a:chOff x="0" y="0"/>
+          <a:chExt cx="0" cy="0"/>
+        </a:xfrm>
+      </p:grpSpPr>
+      <p:sp>
+        <p:nvSpPr>
+          <p:cNvPr id="4" name="テキスト ボックス 3">
+            <a:extLst>
+              <a:ext uri="{FF2B5EF4-FFF2-40B4-BE49-F238E27FC236}">
+                <a16:creationId xmlns:a16="http://schemas.microsoft.com/office/drawing/2014/main" id="{5A13BF46-B8C5-48AA-8308-C9ECFF431A18}"/>
+              </a:ext>
+            </a:extLst>
+          </p:cNvPr>
+          <p:cNvSpPr txBox="1"/>
+          <p:nvPr/>
+        </p:nvSpPr>
+        <p:spPr>
+          <a:xfrm>
+            <a:off x="567542" y="491954"/>
+            <a:ext cx="2763898" cy="584775"/>
+          </a:xfrm>
+          <a:prstGeom prst="rect">
+            <a:avLst/>
+          </a:prstGeom>
+          <a:noFill/>
+        </p:spPr>
+        <p:txBody>
+          <a:bodyPr wrap="none" rtlCol="0">
+            <a:spAutoFit/>
+          </a:bodyPr>
+          <a:lstStyle/>
+          <a:p>
+            <a:r>
+              <a:rPr kumimoji="1" lang="ja-JP" altLang="en-US" sz="3200" b="1" u="sng" dirty="0"/>
+              <a:t>就職作品 制作</a:t>
+            </a:r>
+            <a:endParaRPr kumimoji="1" lang="en-US" altLang="ja-JP" sz="3200" b="1" u="sng" dirty="0"/>
+          </a:p>
+        </p:txBody>
+      </p:sp>
+      <p:sp>
+        <p:nvSpPr>
+          <p:cNvPr id="6" name="テキスト ボックス 5">
+            <a:extLst>
+              <a:ext uri="{FF2B5EF4-FFF2-40B4-BE49-F238E27FC236}">
+                <a16:creationId xmlns:a16="http://schemas.microsoft.com/office/drawing/2014/main" id="{55830AD6-028B-4C4E-80BF-B70DFC1C3A46}"/>
+              </a:ext>
+            </a:extLst>
+          </p:cNvPr>
+          <p:cNvSpPr txBox="1"/>
+          <p:nvPr/>
+        </p:nvSpPr>
+        <p:spPr>
+          <a:xfrm>
+            <a:off x="567542" y="1216429"/>
             <a:ext cx="9110186" cy="3046988"/>
           </a:xfrm>
           <a:prstGeom prst="rect">
@@ -4539,7 +4768,7 @@
 </p:sld>
 </file>
 
-<file path=ppt/slides/slide6.xml><?xml version="1.0" encoding="utf-8"?>
+<file path=ppt/slides/slide7.xml><?xml version="1.0" encoding="utf-8"?>
 <p:sld xmlns:a="http://schemas.openxmlformats.org/drawingml/2006/main" xmlns:r="http://schemas.openxmlformats.org/officeDocument/2006/relationships" xmlns:p="http://schemas.openxmlformats.org/presentationml/2006/main">
   <p:cSld>
     <p:spTree>

--- a/ゲーム科2年/00_前期/ゲーム開発Ⅱ/02_就職作品.pptx
+++ b/ゲーム科2年/00_前期/ゲーム開発Ⅱ/02_就職作品.pptx
@@ -265,7 +265,7 @@
           <a:p>
             <a:fld id="{E9CC885B-4903-4D54-9A93-00025F12DED9}" type="datetimeFigureOut">
               <a:rPr kumimoji="1" lang="ja-JP" altLang="en-US" smtClean="0"/>
-              <a:t>2026/5/18</a:t>
+              <a:t>2026/5/19</a:t>
             </a:fld>
             <a:endParaRPr kumimoji="1" lang="ja-JP" altLang="en-US"/>
           </a:p>
@@ -495,7 +495,7 @@
           <a:p>
             <a:fld id="{E9CC885B-4903-4D54-9A93-00025F12DED9}" type="datetimeFigureOut">
               <a:rPr kumimoji="1" lang="ja-JP" altLang="en-US" smtClean="0"/>
-              <a:t>2026/5/18</a:t>
+              <a:t>2026/5/19</a:t>
             </a:fld>
             <a:endParaRPr kumimoji="1" lang="ja-JP" altLang="en-US"/>
           </a:p>
@@ -735,7 +735,7 @@
           <a:p>
             <a:fld id="{E9CC885B-4903-4D54-9A93-00025F12DED9}" type="datetimeFigureOut">
               <a:rPr kumimoji="1" lang="ja-JP" altLang="en-US" smtClean="0"/>
-              <a:t>2026/5/18</a:t>
+              <a:t>2026/5/19</a:t>
             </a:fld>
             <a:endParaRPr kumimoji="1" lang="ja-JP" altLang="en-US"/>
           </a:p>
@@ -965,7 +965,7 @@
           <a:p>
             <a:fld id="{E9CC885B-4903-4D54-9A93-00025F12DED9}" type="datetimeFigureOut">
               <a:rPr kumimoji="1" lang="ja-JP" altLang="en-US" smtClean="0"/>
-              <a:t>2026/5/18</a:t>
+              <a:t>2026/5/19</a:t>
             </a:fld>
             <a:endParaRPr kumimoji="1" lang="ja-JP" altLang="en-US"/>
           </a:p>
@@ -1240,7 +1240,7 @@
           <a:p>
             <a:fld id="{E9CC885B-4903-4D54-9A93-00025F12DED9}" type="datetimeFigureOut">
               <a:rPr kumimoji="1" lang="ja-JP" altLang="en-US" smtClean="0"/>
-              <a:t>2026/5/18</a:t>
+              <a:t>2026/5/19</a:t>
             </a:fld>
             <a:endParaRPr kumimoji="1" lang="ja-JP" altLang="en-US"/>
           </a:p>
@@ -1569,7 +1569,7 @@
           <a:p>
             <a:fld id="{E9CC885B-4903-4D54-9A93-00025F12DED9}" type="datetimeFigureOut">
               <a:rPr kumimoji="1" lang="ja-JP" altLang="en-US" smtClean="0"/>
-              <a:t>2026/5/18</a:t>
+              <a:t>2026/5/19</a:t>
             </a:fld>
             <a:endParaRPr kumimoji="1" lang="ja-JP" altLang="en-US"/>
           </a:p>
@@ -2045,7 +2045,7 @@
           <a:p>
             <a:fld id="{E9CC885B-4903-4D54-9A93-00025F12DED9}" type="datetimeFigureOut">
               <a:rPr kumimoji="1" lang="ja-JP" altLang="en-US" smtClean="0"/>
-              <a:t>2026/5/18</a:t>
+              <a:t>2026/5/19</a:t>
             </a:fld>
             <a:endParaRPr kumimoji="1" lang="ja-JP" altLang="en-US"/>
           </a:p>
@@ -2186,7 +2186,7 @@
           <a:p>
             <a:fld id="{E9CC885B-4903-4D54-9A93-00025F12DED9}" type="datetimeFigureOut">
               <a:rPr kumimoji="1" lang="ja-JP" altLang="en-US" smtClean="0"/>
-              <a:t>2026/5/18</a:t>
+              <a:t>2026/5/19</a:t>
             </a:fld>
             <a:endParaRPr kumimoji="1" lang="ja-JP" altLang="en-US"/>
           </a:p>
@@ -2299,7 +2299,7 @@
           <a:p>
             <a:fld id="{E9CC885B-4903-4D54-9A93-00025F12DED9}" type="datetimeFigureOut">
               <a:rPr kumimoji="1" lang="ja-JP" altLang="en-US" smtClean="0"/>
-              <a:t>2026/5/18</a:t>
+              <a:t>2026/5/19</a:t>
             </a:fld>
             <a:endParaRPr kumimoji="1" lang="ja-JP" altLang="en-US"/>
           </a:p>
@@ -2642,7 +2642,7 @@
           <a:p>
             <a:fld id="{E9CC885B-4903-4D54-9A93-00025F12DED9}" type="datetimeFigureOut">
               <a:rPr kumimoji="1" lang="ja-JP" altLang="en-US" smtClean="0"/>
-              <a:t>2026/5/18</a:t>
+              <a:t>2026/5/19</a:t>
             </a:fld>
             <a:endParaRPr kumimoji="1" lang="ja-JP" altLang="en-US"/>
           </a:p>
@@ -2930,7 +2930,7 @@
           <a:p>
             <a:fld id="{E9CC885B-4903-4D54-9A93-00025F12DED9}" type="datetimeFigureOut">
               <a:rPr kumimoji="1" lang="ja-JP" altLang="en-US" smtClean="0"/>
-              <a:t>2026/5/18</a:t>
+              <a:t>2026/5/19</a:t>
             </a:fld>
             <a:endParaRPr kumimoji="1" lang="ja-JP" altLang="en-US"/>
           </a:p>
@@ -3203,7 +3203,7 @@
           <a:p>
             <a:fld id="{E9CC885B-4903-4D54-9A93-00025F12DED9}" type="datetimeFigureOut">
               <a:rPr kumimoji="1" lang="ja-JP" altLang="en-US" smtClean="0"/>
-              <a:t>2026/5/18</a:t>
+              <a:t>2026/5/19</a:t>
             </a:fld>
             <a:endParaRPr kumimoji="1" lang="ja-JP" altLang="en-US"/>
           </a:p>
@@ -3808,7 +3808,7 @@
         <p:spPr>
           <a:xfrm>
             <a:off x="567542" y="1216429"/>
-            <a:ext cx="10512814" cy="4154984"/>
+            <a:ext cx="10512814" cy="4524315"/>
           </a:xfrm>
           <a:prstGeom prst="rect">
             <a:avLst/>
@@ -3952,6 +3952,17 @@
             <a:r>
               <a:rPr lang="ja-JP" altLang="en-US" sz="2400" dirty="0"/>
               <a:t>月から一斉に始まる書類選考へ応募する</a:t>
+            </a:r>
+            <a:endParaRPr lang="en-US" altLang="ja-JP" sz="2400" dirty="0"/>
+          </a:p>
+          <a:p>
+            <a:r>
+              <a:rPr lang="en-US" altLang="ja-JP" sz="2400" dirty="0"/>
+              <a:t>※</a:t>
+            </a:r>
+            <a:r>
+              <a:rPr lang="ja-JP" altLang="en-US" sz="2400" dirty="0"/>
+              <a:t>上手くいけば来年の５月頃には業界内定がもらえます</a:t>
             </a:r>
             <a:endParaRPr lang="en-US" altLang="ja-JP" sz="2400" dirty="0"/>
           </a:p>

--- a/ゲーム科2年/00_前期/ゲーム開発Ⅱ/02_就職作品.pptx
+++ b/ゲーム科2年/00_前期/ゲーム開発Ⅱ/02_就職作品.pptx
@@ -265,7 +265,7 @@
           <a:p>
             <a:fld id="{E9CC885B-4903-4D54-9A93-00025F12DED9}" type="datetimeFigureOut">
               <a:rPr kumimoji="1" lang="ja-JP" altLang="en-US" smtClean="0"/>
-              <a:t>2026/5/19</a:t>
+              <a:t>2026/5/26</a:t>
             </a:fld>
             <a:endParaRPr kumimoji="1" lang="ja-JP" altLang="en-US"/>
           </a:p>
@@ -495,7 +495,7 @@
           <a:p>
             <a:fld id="{E9CC885B-4903-4D54-9A93-00025F12DED9}" type="datetimeFigureOut">
               <a:rPr kumimoji="1" lang="ja-JP" altLang="en-US" smtClean="0"/>
-              <a:t>2026/5/19</a:t>
+              <a:t>2026/5/26</a:t>
             </a:fld>
             <a:endParaRPr kumimoji="1" lang="ja-JP" altLang="en-US"/>
           </a:p>
@@ -735,7 +735,7 @@
           <a:p>
             <a:fld id="{E9CC885B-4903-4D54-9A93-00025F12DED9}" type="datetimeFigureOut">
               <a:rPr kumimoji="1" lang="ja-JP" altLang="en-US" smtClean="0"/>
-              <a:t>2026/5/19</a:t>
+              <a:t>2026/5/26</a:t>
             </a:fld>
             <a:endParaRPr kumimoji="1" lang="ja-JP" altLang="en-US"/>
           </a:p>
@@ -965,7 +965,7 @@
           <a:p>
             <a:fld id="{E9CC885B-4903-4D54-9A93-00025F12DED9}" type="datetimeFigureOut">
               <a:rPr kumimoji="1" lang="ja-JP" altLang="en-US" smtClean="0"/>
-              <a:t>2026/5/19</a:t>
+              <a:t>2026/5/26</a:t>
             </a:fld>
             <a:endParaRPr kumimoji="1" lang="ja-JP" altLang="en-US"/>
           </a:p>
@@ -1240,7 +1240,7 @@
           <a:p>
             <a:fld id="{E9CC885B-4903-4D54-9A93-00025F12DED9}" type="datetimeFigureOut">
               <a:rPr kumimoji="1" lang="ja-JP" altLang="en-US" smtClean="0"/>
-              <a:t>2026/5/19</a:t>
+              <a:t>2026/5/26</a:t>
             </a:fld>
             <a:endParaRPr kumimoji="1" lang="ja-JP" altLang="en-US"/>
           </a:p>
@@ -1569,7 +1569,7 @@
           <a:p>
             <a:fld id="{E9CC885B-4903-4D54-9A93-00025F12DED9}" type="datetimeFigureOut">
               <a:rPr kumimoji="1" lang="ja-JP" altLang="en-US" smtClean="0"/>
-              <a:t>2026/5/19</a:t>
+              <a:t>2026/5/26</a:t>
             </a:fld>
             <a:endParaRPr kumimoji="1" lang="ja-JP" altLang="en-US"/>
           </a:p>
@@ -2045,7 +2045,7 @@
           <a:p>
             <a:fld id="{E9CC885B-4903-4D54-9A93-00025F12DED9}" type="datetimeFigureOut">
               <a:rPr kumimoji="1" lang="ja-JP" altLang="en-US" smtClean="0"/>
-              <a:t>2026/5/19</a:t>
+              <a:t>2026/5/26</a:t>
             </a:fld>
             <a:endParaRPr kumimoji="1" lang="ja-JP" altLang="en-US"/>
           </a:p>
@@ -2186,7 +2186,7 @@
           <a:p>
             <a:fld id="{E9CC885B-4903-4D54-9A93-00025F12DED9}" type="datetimeFigureOut">
               <a:rPr kumimoji="1" lang="ja-JP" altLang="en-US" smtClean="0"/>
-              <a:t>2026/5/19</a:t>
+              <a:t>2026/5/26</a:t>
             </a:fld>
             <a:endParaRPr kumimoji="1" lang="ja-JP" altLang="en-US"/>
           </a:p>
@@ -2299,7 +2299,7 @@
           <a:p>
             <a:fld id="{E9CC885B-4903-4D54-9A93-00025F12DED9}" type="datetimeFigureOut">
               <a:rPr kumimoji="1" lang="ja-JP" altLang="en-US" smtClean="0"/>
-              <a:t>2026/5/19</a:t>
+              <a:t>2026/5/26</a:t>
             </a:fld>
             <a:endParaRPr kumimoji="1" lang="ja-JP" altLang="en-US"/>
           </a:p>
@@ -2642,7 +2642,7 @@
           <a:p>
             <a:fld id="{E9CC885B-4903-4D54-9A93-00025F12DED9}" type="datetimeFigureOut">
               <a:rPr kumimoji="1" lang="ja-JP" altLang="en-US" smtClean="0"/>
-              <a:t>2026/5/19</a:t>
+              <a:t>2026/5/26</a:t>
             </a:fld>
             <a:endParaRPr kumimoji="1" lang="ja-JP" altLang="en-US"/>
           </a:p>
@@ -2930,7 +2930,7 @@
           <a:p>
             <a:fld id="{E9CC885B-4903-4D54-9A93-00025F12DED9}" type="datetimeFigureOut">
               <a:rPr kumimoji="1" lang="ja-JP" altLang="en-US" smtClean="0"/>
-              <a:t>2026/5/19</a:t>
+              <a:t>2026/5/26</a:t>
             </a:fld>
             <a:endParaRPr kumimoji="1" lang="ja-JP" altLang="en-US"/>
           </a:p>
@@ -3203,7 +3203,7 @@
           <a:p>
             <a:fld id="{E9CC885B-4903-4D54-9A93-00025F12DED9}" type="datetimeFigureOut">
               <a:rPr kumimoji="1" lang="ja-JP" altLang="en-US" smtClean="0"/>
-              <a:t>2026/5/19</a:t>
+              <a:t>2026/5/26</a:t>
             </a:fld>
             <a:endParaRPr kumimoji="1" lang="ja-JP" altLang="en-US"/>
           </a:p>
@@ -3962,7 +3962,7 @@
             </a:r>
             <a:r>
               <a:rPr lang="ja-JP" altLang="en-US" sz="2400" dirty="0"/>
-              <a:t>上手くいけば来年の５月頃には業界内定がもらえます</a:t>
+              <a:t>上手くいけば来年の５月頃には内定がもらえます</a:t>
             </a:r>
             <a:endParaRPr lang="en-US" altLang="ja-JP" sz="2400" dirty="0"/>
           </a:p>
@@ -4407,7 +4407,15 @@
           <a:p>
             <a:r>
               <a:rPr lang="ja-JP" altLang="en-US" sz="2400" dirty="0"/>
-              <a:t>先生と相談しながら実装内容を考えていきましょう。</a:t>
+              <a:t>先生と</a:t>
+            </a:r>
+            <a:r>
+              <a:rPr lang="ja-JP" altLang="en-US" sz="2400"/>
+              <a:t>相談しながらスケジュールを</a:t>
+            </a:r>
+            <a:r>
+              <a:rPr lang="ja-JP" altLang="en-US" sz="2400" dirty="0"/>
+              <a:t>考えていきましょう。</a:t>
             </a:r>
             <a:endParaRPr lang="en-US" altLang="ja-JP" sz="2400" dirty="0"/>
           </a:p>

--- a/ゲーム科2年/00_前期/ゲーム開発Ⅱ/02_就職作品.pptx
+++ b/ゲーム科2年/00_前期/ゲーム開発Ⅱ/02_就職作品.pptx
@@ -10,8 +10,9 @@
     <p:sldId id="262" r:id="rId4"/>
     <p:sldId id="264" r:id="rId5"/>
     <p:sldId id="259" r:id="rId6"/>
-    <p:sldId id="260" r:id="rId7"/>
-    <p:sldId id="263" r:id="rId8"/>
+    <p:sldId id="265" r:id="rId7"/>
+    <p:sldId id="260" r:id="rId8"/>
+    <p:sldId id="263" r:id="rId9"/>
   </p:sldIdLst>
   <p:sldSz cx="12192000" cy="6858000"/>
   <p:notesSz cx="6858000" cy="9144000"/>
@@ -265,7 +266,7 @@
           <a:p>
             <a:fld id="{E9CC885B-4903-4D54-9A93-00025F12DED9}" type="datetimeFigureOut">
               <a:rPr kumimoji="1" lang="ja-JP" altLang="en-US" smtClean="0"/>
-              <a:t>2026/5/26</a:t>
+              <a:t>2026/5/27</a:t>
             </a:fld>
             <a:endParaRPr kumimoji="1" lang="ja-JP" altLang="en-US"/>
           </a:p>
@@ -495,7 +496,7 @@
           <a:p>
             <a:fld id="{E9CC885B-4903-4D54-9A93-00025F12DED9}" type="datetimeFigureOut">
               <a:rPr kumimoji="1" lang="ja-JP" altLang="en-US" smtClean="0"/>
-              <a:t>2026/5/26</a:t>
+              <a:t>2026/5/27</a:t>
             </a:fld>
             <a:endParaRPr kumimoji="1" lang="ja-JP" altLang="en-US"/>
           </a:p>
@@ -735,7 +736,7 @@
           <a:p>
             <a:fld id="{E9CC885B-4903-4D54-9A93-00025F12DED9}" type="datetimeFigureOut">
               <a:rPr kumimoji="1" lang="ja-JP" altLang="en-US" smtClean="0"/>
-              <a:t>2026/5/26</a:t>
+              <a:t>2026/5/27</a:t>
             </a:fld>
             <a:endParaRPr kumimoji="1" lang="ja-JP" altLang="en-US"/>
           </a:p>
@@ -965,7 +966,7 @@
           <a:p>
             <a:fld id="{E9CC885B-4903-4D54-9A93-00025F12DED9}" type="datetimeFigureOut">
               <a:rPr kumimoji="1" lang="ja-JP" altLang="en-US" smtClean="0"/>
-              <a:t>2026/5/26</a:t>
+              <a:t>2026/5/27</a:t>
             </a:fld>
             <a:endParaRPr kumimoji="1" lang="ja-JP" altLang="en-US"/>
           </a:p>
@@ -1240,7 +1241,7 @@
           <a:p>
             <a:fld id="{E9CC885B-4903-4D54-9A93-00025F12DED9}" type="datetimeFigureOut">
               <a:rPr kumimoji="1" lang="ja-JP" altLang="en-US" smtClean="0"/>
-              <a:t>2026/5/26</a:t>
+              <a:t>2026/5/27</a:t>
             </a:fld>
             <a:endParaRPr kumimoji="1" lang="ja-JP" altLang="en-US"/>
           </a:p>
@@ -1569,7 +1570,7 @@
           <a:p>
             <a:fld id="{E9CC885B-4903-4D54-9A93-00025F12DED9}" type="datetimeFigureOut">
               <a:rPr kumimoji="1" lang="ja-JP" altLang="en-US" smtClean="0"/>
-              <a:t>2026/5/26</a:t>
+              <a:t>2026/5/27</a:t>
             </a:fld>
             <a:endParaRPr kumimoji="1" lang="ja-JP" altLang="en-US"/>
           </a:p>
@@ -2045,7 +2046,7 @@
           <a:p>
             <a:fld id="{E9CC885B-4903-4D54-9A93-00025F12DED9}" type="datetimeFigureOut">
               <a:rPr kumimoji="1" lang="ja-JP" altLang="en-US" smtClean="0"/>
-              <a:t>2026/5/26</a:t>
+              <a:t>2026/5/27</a:t>
             </a:fld>
             <a:endParaRPr kumimoji="1" lang="ja-JP" altLang="en-US"/>
           </a:p>
@@ -2186,7 +2187,7 @@
           <a:p>
             <a:fld id="{E9CC885B-4903-4D54-9A93-00025F12DED9}" type="datetimeFigureOut">
               <a:rPr kumimoji="1" lang="ja-JP" altLang="en-US" smtClean="0"/>
-              <a:t>2026/5/26</a:t>
+              <a:t>2026/5/27</a:t>
             </a:fld>
             <a:endParaRPr kumimoji="1" lang="ja-JP" altLang="en-US"/>
           </a:p>
@@ -2299,7 +2300,7 @@
           <a:p>
             <a:fld id="{E9CC885B-4903-4D54-9A93-00025F12DED9}" type="datetimeFigureOut">
               <a:rPr kumimoji="1" lang="ja-JP" altLang="en-US" smtClean="0"/>
-              <a:t>2026/5/26</a:t>
+              <a:t>2026/5/27</a:t>
             </a:fld>
             <a:endParaRPr kumimoji="1" lang="ja-JP" altLang="en-US"/>
           </a:p>
@@ -2642,7 +2643,7 @@
           <a:p>
             <a:fld id="{E9CC885B-4903-4D54-9A93-00025F12DED9}" type="datetimeFigureOut">
               <a:rPr kumimoji="1" lang="ja-JP" altLang="en-US" smtClean="0"/>
-              <a:t>2026/5/26</a:t>
+              <a:t>2026/5/27</a:t>
             </a:fld>
             <a:endParaRPr kumimoji="1" lang="ja-JP" altLang="en-US"/>
           </a:p>
@@ -2930,7 +2931,7 @@
           <a:p>
             <a:fld id="{E9CC885B-4903-4D54-9A93-00025F12DED9}" type="datetimeFigureOut">
               <a:rPr kumimoji="1" lang="ja-JP" altLang="en-US" smtClean="0"/>
-              <a:t>2026/5/26</a:t>
+              <a:t>2026/5/27</a:t>
             </a:fld>
             <a:endParaRPr kumimoji="1" lang="ja-JP" altLang="en-US"/>
           </a:p>
@@ -3203,7 +3204,7 @@
           <a:p>
             <a:fld id="{E9CC885B-4903-4D54-9A93-00025F12DED9}" type="datetimeFigureOut">
               <a:rPr kumimoji="1" lang="ja-JP" altLang="en-US" smtClean="0"/>
-              <a:t>2026/5/26</a:t>
+              <a:t>2026/5/27</a:t>
             </a:fld>
             <a:endParaRPr kumimoji="1" lang="ja-JP" altLang="en-US"/>
           </a:p>
@@ -4258,7 +4259,7 @@
         <p:spPr>
           <a:xfrm>
             <a:off x="567542" y="1216429"/>
-            <a:ext cx="10033516" cy="4893647"/>
+            <a:ext cx="10033516" cy="5632311"/>
           </a:xfrm>
           <a:prstGeom prst="rect">
             <a:avLst/>
@@ -4287,6 +4288,36 @@
             </a:r>
             <a:r>
               <a:rPr lang="en-US" altLang="ja-JP" sz="2400" dirty="0"/>
+              <a:t>6/5		</a:t>
+            </a:r>
+            <a:r>
+              <a:rPr lang="ja-JP" altLang="en-US" sz="2400" dirty="0"/>
+              <a:t>企画の期限</a:t>
+            </a:r>
+            <a:endParaRPr lang="en-US" altLang="ja-JP" sz="2400" dirty="0"/>
+          </a:p>
+          <a:p>
+            <a:r>
+              <a:rPr lang="ja-JP" altLang="en-US" sz="2400" dirty="0"/>
+              <a:t>・</a:t>
+            </a:r>
+            <a:r>
+              <a:rPr lang="en-US" altLang="ja-JP" sz="2400" dirty="0"/>
+              <a:t>6/19	</a:t>
+            </a:r>
+            <a:r>
+              <a:rPr lang="ja-JP" altLang="en-US" sz="2400" dirty="0"/>
+              <a:t>仕様とスケジュールの期限</a:t>
+            </a:r>
+            <a:endParaRPr lang="en-US" altLang="ja-JP" sz="2400" dirty="0"/>
+          </a:p>
+          <a:p>
+            <a:r>
+              <a:rPr lang="ja-JP" altLang="en-US" sz="2400" dirty="0"/>
+              <a:t>・</a:t>
+            </a:r>
+            <a:r>
+              <a:rPr lang="en-US" altLang="ja-JP" sz="2400" dirty="0"/>
               <a:t>6/30	</a:t>
             </a:r>
             <a:r>
@@ -4407,15 +4438,7 @@
           <a:p>
             <a:r>
               <a:rPr lang="ja-JP" altLang="en-US" sz="2400" dirty="0"/>
-              <a:t>先生と</a:t>
-            </a:r>
-            <a:r>
-              <a:rPr lang="ja-JP" altLang="en-US" sz="2400"/>
-              <a:t>相談しながらスケジュールを</a:t>
-            </a:r>
-            <a:r>
-              <a:rPr lang="ja-JP" altLang="en-US" sz="2400" dirty="0"/>
-              <a:t>考えていきましょう。</a:t>
+              <a:t>先生と相談しながらスケジュールを考えていきましょう。</a:t>
             </a:r>
             <a:endParaRPr lang="en-US" altLang="ja-JP" sz="2400" dirty="0"/>
           </a:p>
@@ -4668,7 +4691,7 @@
         <p:spPr>
           <a:xfrm>
             <a:off x="567542" y="491954"/>
-            <a:ext cx="2763898" cy="584775"/>
+            <a:ext cx="4815742" cy="584775"/>
           </a:xfrm>
           <a:prstGeom prst="rect">
             <a:avLst/>
@@ -4683,7 +4706,11 @@
           <a:p>
             <a:r>
               <a:rPr kumimoji="1" lang="ja-JP" altLang="en-US" sz="3200" b="1" u="sng" dirty="0"/>
-              <a:t>就職作品 制作</a:t>
+              <a:t>就職作品 </a:t>
+            </a:r>
+            <a:r>
+              <a:rPr lang="ja-JP" altLang="en-US" sz="3200" b="1" u="sng" dirty="0"/>
+              <a:t>バージョン管理</a:t>
             </a:r>
             <a:endParaRPr kumimoji="1" lang="en-US" altLang="ja-JP" sz="3200" b="1" u="sng" dirty="0"/>
           </a:p>
@@ -4704,7 +4731,7 @@
         <p:spPr>
           <a:xfrm>
             <a:off x="567542" y="1216429"/>
-            <a:ext cx="9110186" cy="3046988"/>
+            <a:ext cx="11006539" cy="3785652"/>
           </a:xfrm>
           <a:prstGeom prst="rect">
             <a:avLst/>
@@ -4719,16 +4746,243 @@
           <a:p>
             <a:r>
               <a:rPr lang="ja-JP" altLang="en-US" sz="2400" dirty="0"/>
+              <a:t>就職作品は長期制作になります。</a:t>
+            </a:r>
+            <a:endParaRPr lang="en-US" altLang="ja-JP" sz="2400" dirty="0"/>
+          </a:p>
+          <a:p>
+            <a:r>
+              <a:rPr lang="ja-JP" altLang="en-US" sz="2400" dirty="0"/>
+              <a:t>チーム制作の時に使った</a:t>
+            </a:r>
+            <a:r>
+              <a:rPr lang="en-US" altLang="ja-JP" sz="2400" dirty="0"/>
+              <a:t>GitHub</a:t>
+            </a:r>
+            <a:r>
+              <a:rPr lang="ja-JP" altLang="en-US" sz="2400" dirty="0"/>
+              <a:t>を使用して、</a:t>
+            </a:r>
+            <a:endParaRPr lang="en-US" altLang="ja-JP" sz="2400" dirty="0"/>
+          </a:p>
+          <a:p>
+            <a:r>
+              <a:rPr lang="ja-JP" altLang="en-US" sz="2400" b="1" dirty="0">
+                <a:solidFill>
+                  <a:srgbClr val="FF0000"/>
+                </a:solidFill>
+              </a:rPr>
+              <a:t>こまめに作業状況を</a:t>
+            </a:r>
+            <a:r>
+              <a:rPr lang="en-US" altLang="ja-JP" sz="2400" b="1" dirty="0">
+                <a:solidFill>
+                  <a:srgbClr val="FF0000"/>
+                </a:solidFill>
+              </a:rPr>
+              <a:t>Push</a:t>
+            </a:r>
+            <a:r>
+              <a:rPr lang="ja-JP" altLang="en-US" sz="2400" dirty="0"/>
+              <a:t>しながら作業しましょう。</a:t>
+            </a:r>
+            <a:endParaRPr lang="en-US" altLang="ja-JP" sz="2400" dirty="0"/>
+          </a:p>
+          <a:p>
+            <a:endParaRPr lang="en-US" altLang="ja-JP" sz="2400" dirty="0"/>
+          </a:p>
+          <a:p>
+            <a:r>
+              <a:rPr lang="ja-JP" altLang="en-US" sz="2400" b="1" dirty="0">
+                <a:solidFill>
+                  <a:srgbClr val="FF0000"/>
+                </a:solidFill>
+              </a:rPr>
+              <a:t>■やってほしいこと</a:t>
+            </a:r>
+            <a:endParaRPr lang="en-US" altLang="ja-JP" sz="2400" b="1" dirty="0">
+              <a:solidFill>
+                <a:srgbClr val="FF0000"/>
+              </a:solidFill>
+            </a:endParaRPr>
+          </a:p>
+          <a:p>
+            <a:r>
+              <a:rPr lang="ja-JP" altLang="en-US" sz="2400" dirty="0"/>
+              <a:t>・１日１回学校から帰る前に必ず</a:t>
+            </a:r>
+            <a:r>
+              <a:rPr lang="en-US" altLang="ja-JP" sz="2400" dirty="0"/>
+              <a:t>Push</a:t>
+            </a:r>
+          </a:p>
+          <a:p>
+            <a:r>
+              <a:rPr lang="ja-JP" altLang="en-US" sz="2400" dirty="0"/>
+              <a:t>・作業がひと段落するたびに</a:t>
+            </a:r>
+            <a:r>
+              <a:rPr lang="en-US" altLang="ja-JP" sz="2400" dirty="0"/>
+              <a:t>Push</a:t>
+            </a:r>
+          </a:p>
+          <a:p>
+            <a:r>
+              <a:rPr lang="ja-JP" altLang="en-US" sz="2400" dirty="0"/>
+              <a:t>・家の</a:t>
+            </a:r>
+            <a:r>
+              <a:rPr lang="en-US" altLang="ja-JP" sz="2400" dirty="0"/>
+              <a:t>PC</a:t>
+            </a:r>
+            <a:r>
+              <a:rPr lang="ja-JP" altLang="en-US" sz="2400" dirty="0"/>
+              <a:t>にもバージョン管理の環境を作って、</a:t>
+            </a:r>
+            <a:r>
+              <a:rPr lang="en-US" altLang="ja-JP" sz="2400" dirty="0" err="1"/>
+              <a:t>Pull&amp;Push</a:t>
+            </a:r>
+            <a:r>
+              <a:rPr lang="ja-JP" altLang="en-US" sz="2400" dirty="0"/>
+              <a:t>できるようにする。</a:t>
+            </a:r>
+            <a:endParaRPr lang="en-US" altLang="ja-JP" sz="2400" dirty="0"/>
+          </a:p>
+          <a:p>
+            <a:endParaRPr lang="en-US" altLang="ja-JP" sz="2400" dirty="0"/>
+          </a:p>
+          <a:p>
+            <a:r>
+              <a:rPr lang="en-US" altLang="ja-JP" sz="2400" dirty="0"/>
+              <a:t>※</a:t>
+            </a:r>
+            <a:r>
+              <a:rPr lang="ja-JP" altLang="en-US" sz="2400" dirty="0"/>
+              <a:t>このあと一緒にリポジトリを作りましょう</a:t>
+            </a:r>
+            <a:endParaRPr lang="en-US" altLang="ja-JP" sz="2400" dirty="0"/>
+          </a:p>
+        </p:txBody>
+      </p:sp>
+    </p:spTree>
+    <p:extLst>
+      <p:ext uri="{BB962C8B-B14F-4D97-AF65-F5344CB8AC3E}">
+        <p14:creationId xmlns:p14="http://schemas.microsoft.com/office/powerpoint/2010/main" val="1062133156"/>
+      </p:ext>
+    </p:extLst>
+  </p:cSld>
+  <p:clrMapOvr>
+    <a:masterClrMapping/>
+  </p:clrMapOvr>
+</p:sld>
+</file>
+
+<file path=ppt/slides/slide7.xml><?xml version="1.0" encoding="utf-8"?>
+<p:sld xmlns:a="http://schemas.openxmlformats.org/drawingml/2006/main" xmlns:r="http://schemas.openxmlformats.org/officeDocument/2006/relationships" xmlns:p="http://schemas.openxmlformats.org/presentationml/2006/main">
+  <p:cSld>
+    <p:spTree>
+      <p:nvGrpSpPr>
+        <p:cNvPr id="1" name=""/>
+        <p:cNvGrpSpPr/>
+        <p:nvPr/>
+      </p:nvGrpSpPr>
+      <p:grpSpPr>
+        <a:xfrm>
+          <a:off x="0" y="0"/>
+          <a:ext cx="0" cy="0"/>
+          <a:chOff x="0" y="0"/>
+          <a:chExt cx="0" cy="0"/>
+        </a:xfrm>
+      </p:grpSpPr>
+      <p:sp>
+        <p:nvSpPr>
+          <p:cNvPr id="4" name="テキスト ボックス 3">
+            <a:extLst>
+              <a:ext uri="{FF2B5EF4-FFF2-40B4-BE49-F238E27FC236}">
+                <a16:creationId xmlns:a16="http://schemas.microsoft.com/office/drawing/2014/main" id="{5A13BF46-B8C5-48AA-8308-C9ECFF431A18}"/>
+              </a:ext>
+            </a:extLst>
+          </p:cNvPr>
+          <p:cNvSpPr txBox="1"/>
+          <p:nvPr/>
+        </p:nvSpPr>
+        <p:spPr>
+          <a:xfrm>
+            <a:off x="567542" y="491954"/>
+            <a:ext cx="3584636" cy="584775"/>
+          </a:xfrm>
+          <a:prstGeom prst="rect">
+            <a:avLst/>
+          </a:prstGeom>
+          <a:noFill/>
+        </p:spPr>
+        <p:txBody>
+          <a:bodyPr wrap="none" rtlCol="0">
+            <a:spAutoFit/>
+          </a:bodyPr>
+          <a:lstStyle/>
+          <a:p>
+            <a:r>
+              <a:rPr kumimoji="1" lang="ja-JP" altLang="en-US" sz="3200" b="1" u="sng" dirty="0"/>
+              <a:t>就職作品 </a:t>
+            </a:r>
+            <a:r>
+              <a:rPr lang="ja-JP" altLang="en-US" sz="3200" b="1" u="sng" dirty="0"/>
+              <a:t>さいごに</a:t>
+            </a:r>
+            <a:endParaRPr kumimoji="1" lang="en-US" altLang="ja-JP" sz="3200" b="1" u="sng" dirty="0"/>
+          </a:p>
+        </p:txBody>
+      </p:sp>
+      <p:sp>
+        <p:nvSpPr>
+          <p:cNvPr id="6" name="テキスト ボックス 5">
+            <a:extLst>
+              <a:ext uri="{FF2B5EF4-FFF2-40B4-BE49-F238E27FC236}">
+                <a16:creationId xmlns:a16="http://schemas.microsoft.com/office/drawing/2014/main" id="{55830AD6-028B-4C4E-80BF-B70DFC1C3A46}"/>
+              </a:ext>
+            </a:extLst>
+          </p:cNvPr>
+          <p:cNvSpPr txBox="1"/>
+          <p:nvPr/>
+        </p:nvSpPr>
+        <p:spPr>
+          <a:xfrm>
+            <a:off x="567542" y="1216429"/>
+            <a:ext cx="9110186" cy="4154984"/>
+          </a:xfrm>
+          <a:prstGeom prst="rect">
+            <a:avLst/>
+          </a:prstGeom>
+          <a:noFill/>
+        </p:spPr>
+        <p:txBody>
+          <a:bodyPr wrap="none" rtlCol="0">
+            <a:spAutoFit/>
+          </a:bodyPr>
+          <a:lstStyle/>
+          <a:p>
+            <a:r>
+              <a:rPr lang="ja-JP" altLang="en-US" sz="2400" dirty="0"/>
               <a:t>授業で大量の時間を確保していますが、</a:t>
             </a:r>
             <a:endParaRPr lang="en-US" altLang="ja-JP" sz="2400" dirty="0"/>
           </a:p>
           <a:p>
             <a:r>
-              <a:rPr lang="ja-JP" altLang="en-US" sz="2400" dirty="0"/>
+              <a:rPr lang="ja-JP" altLang="en-US" sz="2400" b="1" dirty="0">
+                <a:solidFill>
+                  <a:srgbClr val="FF0000"/>
+                </a:solidFill>
+              </a:rPr>
               <a:t>授業時間のみで作品を完成させた学生は見たことがありません。</a:t>
             </a:r>
-            <a:endParaRPr lang="en-US" altLang="ja-JP" sz="2400" dirty="0"/>
+            <a:endParaRPr lang="en-US" altLang="ja-JP" sz="2400" b="1" dirty="0">
+              <a:solidFill>
+                <a:srgbClr val="FF0000"/>
+              </a:solidFill>
+            </a:endParaRPr>
           </a:p>
           <a:p>
             <a:endParaRPr lang="en-US" altLang="ja-JP" sz="2400" dirty="0"/>
@@ -4742,8 +4996,41 @@
           </a:p>
           <a:p>
             <a:r>
-              <a:rPr lang="ja-JP" altLang="en-US" sz="2400" dirty="0"/>
-              <a:t>可能な限り放課後も残って作業しましょう。</a:t>
+              <a:rPr lang="ja-JP" altLang="en-US" sz="2400" b="1" dirty="0">
+                <a:solidFill>
+                  <a:srgbClr val="FF0000"/>
+                </a:solidFill>
+              </a:rPr>
+              <a:t>可能な限り放課後も残って作業</a:t>
+            </a:r>
+            <a:r>
+              <a:rPr lang="ja-JP" altLang="en-US" sz="2400" dirty="0"/>
+              <a:t>しましょう。</a:t>
+            </a:r>
+            <a:endParaRPr lang="en-US" altLang="ja-JP" sz="2400" dirty="0"/>
+          </a:p>
+          <a:p>
+            <a:endParaRPr lang="en-US" altLang="ja-JP" sz="2400" dirty="0"/>
+          </a:p>
+          <a:p>
+            <a:r>
+              <a:rPr lang="ja-JP" altLang="en-US" sz="2400" b="1" dirty="0">
+                <a:solidFill>
+                  <a:srgbClr val="FF0000"/>
+                </a:solidFill>
+              </a:rPr>
+              <a:t>夏休みや冬休みも作業をする必要が出てきます。</a:t>
+            </a:r>
+            <a:endParaRPr lang="en-US" altLang="ja-JP" sz="2400" b="1" dirty="0">
+              <a:solidFill>
+                <a:srgbClr val="FF0000"/>
+              </a:solidFill>
+            </a:endParaRPr>
+          </a:p>
+          <a:p>
+            <a:r>
+              <a:rPr lang="ja-JP" altLang="en-US" sz="2400" dirty="0"/>
+              <a:t>今のうちから、予定を立てておきましょう。</a:t>
             </a:r>
             <a:endParaRPr lang="en-US" altLang="ja-JP" sz="2400" dirty="0"/>
           </a:p>
@@ -4787,7 +5074,7 @@
 </p:sld>
 </file>
 
-<file path=ppt/slides/slide7.xml><?xml version="1.0" encoding="utf-8"?>
+<file path=ppt/slides/slide8.xml><?xml version="1.0" encoding="utf-8"?>
 <p:sld xmlns:a="http://schemas.openxmlformats.org/drawingml/2006/main" xmlns:r="http://schemas.openxmlformats.org/officeDocument/2006/relationships" xmlns:p="http://schemas.openxmlformats.org/presentationml/2006/main">
   <p:cSld>
     <p:spTree>
